--- a/courseware/202609_DSA_MOOC_Quiz_CH09-10.pptx
+++ b/courseware/202609_DSA_MOOC_Quiz_CH09-10.pptx
@@ -9950,6 +9950,109 @@
           </a:p>
         </p:txBody>
       </p:sp>
+      <p:sp>
+        <p:nvSpPr>
+          <p:cNvPr id="30" name="ANS_132"/>
+          <p:cNvSpPr/>
+          <p:nvPr/>
+        </p:nvSpPr>
+        <p:spPr>
+          <a:xfrm>
+            <a:off x="7616952" y="5042764"/>
+            <a:ext cx="91440" cy="91440"/>
+          </a:xfrm>
+          <a:prstGeom prst="ellipse">
+            <a:avLst/>
+          </a:prstGeom>
+          <a:solidFill>
+            <a:srgbClr val="F2B134"/>
+          </a:solidFill>
+          <a:ln/>
+        </p:spPr>
+      </p:sp>
+      <p:sp>
+        <p:nvSpPr>
+          <p:cNvPr id="31" name="ANS_133"/>
+          <p:cNvSpPr txBox="1"/>
+          <p:nvPr/>
+        </p:nvSpPr>
+        <p:spPr>
+          <a:xfrm>
+            <a:off x="7818120" y="4945990"/>
+            <a:ext cx="3520440" cy="1194816"/>
+          </a:xfrm>
+          <a:prstGeom prst="rect">
+            <a:avLst/>
+          </a:prstGeom>
+          <a:noFill/>
+          <a:ln/>
+        </p:spPr>
+        <p:txBody>
+          <a:bodyPr wrap="square" lIns="0" tIns="0" rIns="0" bIns="0" rtlCol="0" anchor="t"/>
+          <a:lstStyle/>
+          <a:p>
+            <a:pPr algn="l" indent="0" marL="0">
+              <a:buNone/>
+            </a:pPr>
+            <a:r>
+              <a:rPr lang="en-US" sz="1700" dirty="0">
+                <a:solidFill>
+                  <a:srgbClr val="2B2B2B"/>
+                </a:solidFill>
+                <a:latin typeface="Microsoft YaHei" pitchFamily="34" charset="0"/>
+                <a:ea typeface="Microsoft YaHei" pitchFamily="34" charset="-122"/>
+                <a:cs typeface="Microsoft YaHei" pitchFamily="34" charset="-120"/>
+              </a:rPr>
+              <a:t>注：有限 n 时 ΣP</a:t>
+            </a:r>
+            <a:r>
+              <a:rPr lang="en-US" sz="1700" baseline="-40000" dirty="0">
+                <a:solidFill>
+                  <a:srgbClr val="2B2B2B"/>
+                </a:solidFill>
+                <a:latin typeface="Microsoft YaHei" pitchFamily="34" charset="0"/>
+                <a:ea typeface="Microsoft YaHei" pitchFamily="34" charset="-122"/>
+                <a:cs typeface="Microsoft YaHei" pitchFamily="34" charset="-120"/>
+              </a:rPr>
+              <a:t>i</a:t>
+            </a:r>
+            <a:r>
+              <a:rPr lang="en-US" sz="1700" dirty="0">
+                <a:solidFill>
+                  <a:srgbClr val="2B2B2B"/>
+                </a:solidFill>
+                <a:latin typeface="Microsoft YaHei" pitchFamily="34" charset="0"/>
+                <a:ea typeface="Microsoft YaHei" pitchFamily="34" charset="-122"/>
+                <a:cs typeface="Microsoft YaHei" pitchFamily="34" charset="-120"/>
+              </a:rPr>
+              <a:t> = 1 − 1/2</a:t>
+            </a:r>
+            <a:r>
+              <a:rPr lang="en-US" sz="1700" baseline="30000" dirty="0">
+                <a:solidFill>
+                  <a:srgbClr val="2B2B2B"/>
+                </a:solidFill>
+                <a:latin typeface="Microsoft YaHei" pitchFamily="34" charset="0"/>
+                <a:ea typeface="Microsoft YaHei" pitchFamily="34" charset="-122"/>
+                <a:cs typeface="Microsoft YaHei" pitchFamily="34" charset="-120"/>
+              </a:rPr>
+              <a:t>n</a:t>
+            </a:r>
+            <a:r>
+              <a:rPr lang="en-US" sz="1700" dirty="0">
+                <a:solidFill>
+                  <a:srgbClr val="2B2B2B"/>
+                </a:solidFill>
+                <a:latin typeface="Microsoft YaHei" pitchFamily="34" charset="0"/>
+                <a:ea typeface="Microsoft YaHei" pitchFamily="34" charset="-122"/>
+                <a:cs typeface="Microsoft YaHei" pitchFamily="34" charset="-120"/>
+              </a:rPr>
+              <a:t> ≠ 1，题面分布不完整（原书第 10 章习题 1 同错）；不影响极限。</a:t>
+            </a:r>
+            <a:endParaRPr lang="en-US" sz="1700" dirty="0"/>
+          </a:p>
+        </p:txBody>
+      </p:sp>
     </p:spTree>
   </p:cSld>
   <p:clrMapOvr>
@@ -10354,6 +10457,76 @@
                                         <p:cTn id="37" dur="400"/>
                                         <p:tgtEl>
                                           <p:spTgt spid="29"/>
+                                        </p:tgtEl>
+                                      </p:cBhvr>
+                                    </p:animEffect>
+                                  </p:childTnLst>
+                                </p:cTn>
+                              </p:par>
+                              <p:par>
+                                <p:cTn id="38" presetID="10" presetClass="entr" presetSubtype="0" fill="hold" grpId="0" nodeType="withEffect">
+                                  <p:stCondLst>
+                                    <p:cond delay="0"/>
+                                  </p:stCondLst>
+                                  <p:childTnLst>
+                                    <p:set>
+                                      <p:cBhvr>
+                                        <p:cTn id="39" dur="1" fill="hold">
+                                          <p:stCondLst>
+                                            <p:cond delay="0"/>
+                                          </p:stCondLst>
+                                        </p:cTn>
+                                        <p:tgtEl>
+                                          <p:spTgt spid="30"/>
+                                        </p:tgtEl>
+                                        <p:attrNameLst>
+                                          <p:attrName>style.visibility</p:attrName>
+                                        </p:attrNameLst>
+                                      </p:cBhvr>
+                                      <p:to>
+                                        <p:strVal val="visible"/>
+                                      </p:to>
+                                    </p:set>
+                                    <p:animEffect transition="in" filter="fade">
+                                      <p:cBhvr>
+                                        <p:cTn id="40" dur="400"/>
+                                        <p:tgtEl>
+                                          <p:spTgt spid="30"/>
+                                        </p:tgtEl>
+                                      </p:cBhvr>
+                                    </p:animEffect>
+                                  </p:childTnLst>
+                                </p:cTn>
+                              </p:par>
+                              <p:par>
+                                <p:cTn id="41" presetID="10" presetClass="entr" presetSubtype="0" fill="hold" grpId="0" nodeType="withEffect">
+                                  <p:stCondLst>
+                                    <p:cond delay="0"/>
+                                  </p:stCondLst>
+                                  <p:childTnLst>
+                                    <p:set>
+                                      <p:cBhvr>
+                                        <p:cTn id="42" dur="1" fill="hold">
+                                          <p:stCondLst>
+                                            <p:cond delay="0"/>
+                                          </p:stCondLst>
+                                        </p:cTn>
+                                        <p:tgtEl>
+                                          <p:spTgt spid="31"/>
+                                        </p:tgtEl>
+                                        <p:attrNameLst>
+                                          <p:attrName>style.visibility</p:attrName>
+                                        </p:attrNameLst>
+                                      </p:cBhvr>
+                                      <p:to>
+                                        <p:strVal val="visible"/>
+                                      </p:to>
+                                    </p:set>
+                                    <p:animEffect transition="in" filter="fade">
+                                      <p:cBhvr>
+                                        <p:cTn id="43" dur="400"/>
+                                        <p:tgtEl>
+                                          <p:spTgt spid="31"/>
                                         </p:tgtEl>
                                       </p:cBhvr>
                                     </p:animEffect>
@@ -10399,6 +10572,8 @@
       <p:bldP spid="27" grpId="0" animBg="1"/>
       <p:bldP spid="28" grpId="0" animBg="1"/>
       <p:bldP spid="29" grpId="0" animBg="1"/>
+      <p:bldP spid="30" grpId="0" animBg="1"/>
+      <p:bldP spid="31" grpId="0" animBg="1"/>
     </p:bldLst>
   </p:timing>
 </p:sld>
@@ -10998,7 +11173,7 @@
       </p:sp>
       <p:sp>
         <p:nvSpPr>
-          <p:cNvPr id="19" name="ANS_132"/>
+          <p:cNvPr id="19" name="ANS_134"/>
           <p:cNvSpPr/>
           <p:nvPr/>
         </p:nvSpPr>
@@ -11023,7 +11198,7 @@
       </p:sp>
       <p:sp>
         <p:nvSpPr>
-          <p:cNvPr id="20" name="ANS_133"/>
+          <p:cNvPr id="20" name="ANS_135"/>
           <p:cNvSpPr/>
           <p:nvPr/>
         </p:nvSpPr>
@@ -11050,7 +11225,7 @@
       </p:sp>
       <p:sp>
         <p:nvSpPr>
-          <p:cNvPr id="21" name="ANS_134"/>
+          <p:cNvPr id="21" name="ANS_136"/>
           <p:cNvSpPr txBox="1"/>
           <p:nvPr/>
         </p:nvSpPr>
@@ -11089,7 +11264,7 @@
       </p:sp>
       <p:sp>
         <p:nvSpPr>
-          <p:cNvPr id="22" name="ANS_135"/>
+          <p:cNvPr id="22" name="ANS_137"/>
           <p:cNvSpPr txBox="1"/>
           <p:nvPr/>
         </p:nvSpPr>
@@ -11128,7 +11303,7 @@
       </p:sp>
       <p:sp>
         <p:nvSpPr>
-          <p:cNvPr id="23" name="ANS_136"/>
+          <p:cNvPr id="23" name="ANS_138"/>
           <p:cNvSpPr txBox="1"/>
           <p:nvPr/>
         </p:nvSpPr>
@@ -11167,7 +11342,7 @@
       </p:sp>
       <p:sp>
         <p:nvSpPr>
-          <p:cNvPr id="24" name="ANS_137"/>
+          <p:cNvPr id="24" name="ANS_139"/>
           <p:cNvSpPr/>
           <p:nvPr/>
         </p:nvSpPr>
@@ -11187,7 +11362,7 @@
       </p:sp>
       <p:sp>
         <p:nvSpPr>
-          <p:cNvPr id="25" name="ANS_138"/>
+          <p:cNvPr id="25" name="ANS_140"/>
           <p:cNvSpPr txBox="1"/>
           <p:nvPr/>
         </p:nvSpPr>
@@ -11226,7 +11401,7 @@
       </p:sp>
       <p:sp>
         <p:nvSpPr>
-          <p:cNvPr id="26" name="ANS_139"/>
+          <p:cNvPr id="26" name="ANS_141"/>
           <p:cNvSpPr/>
           <p:nvPr/>
         </p:nvSpPr>
@@ -11246,7 +11421,7 @@
       </p:sp>
       <p:sp>
         <p:nvSpPr>
-          <p:cNvPr id="27" name="ANS_140"/>
+          <p:cNvPr id="27" name="ANS_142"/>
           <p:cNvSpPr txBox="1"/>
           <p:nvPr/>
         </p:nvSpPr>
@@ -11285,7 +11460,7 @@
       </p:sp>
       <p:sp>
         <p:nvSpPr>
-          <p:cNvPr id="28" name="ANS_141"/>
+          <p:cNvPr id="28" name="ANS_143"/>
           <p:cNvSpPr/>
           <p:nvPr/>
         </p:nvSpPr>
@@ -11305,7 +11480,7 @@
       </p:sp>
       <p:sp>
         <p:nvSpPr>
-          <p:cNvPr id="29" name="ANS_142"/>
+          <p:cNvPr id="29" name="ANS_144"/>
           <p:cNvSpPr txBox="1"/>
           <p:nvPr/>
         </p:nvSpPr>
@@ -11344,7 +11519,7 @@
       </p:sp>
       <p:sp>
         <p:nvSpPr>
-          <p:cNvPr id="30" name="ANS_143"/>
+          <p:cNvPr id="30" name="ANS_145"/>
           <p:cNvSpPr/>
           <p:nvPr/>
         </p:nvSpPr>
@@ -11364,7 +11539,7 @@
       </p:sp>
       <p:sp>
         <p:nvSpPr>
-          <p:cNvPr id="31" name="ANS_144"/>
+          <p:cNvPr id="31" name="ANS_146"/>
           <p:cNvSpPr txBox="1"/>
           <p:nvPr/>
         </p:nvSpPr>
@@ -12417,7 +12592,7 @@
       </p:sp>
       <p:sp>
         <p:nvSpPr>
-          <p:cNvPr id="15" name="ANS_145"/>
+          <p:cNvPr id="15" name="ANS_147"/>
           <p:cNvSpPr/>
           <p:nvPr/>
         </p:nvSpPr>
@@ -12442,7 +12617,7 @@
       </p:sp>
       <p:sp>
         <p:nvSpPr>
-          <p:cNvPr id="16" name="ANS_146"/>
+          <p:cNvPr id="16" name="ANS_148"/>
           <p:cNvSpPr/>
           <p:nvPr/>
         </p:nvSpPr>
@@ -12469,7 +12644,7 @@
       </p:sp>
       <p:sp>
         <p:nvSpPr>
-          <p:cNvPr id="17" name="ANS_147"/>
+          <p:cNvPr id="17" name="ANS_149"/>
           <p:cNvSpPr txBox="1"/>
           <p:nvPr/>
         </p:nvSpPr>
@@ -12508,7 +12683,7 @@
       </p:sp>
       <p:sp>
         <p:nvSpPr>
-          <p:cNvPr id="18" name="ANS_148"/>
+          <p:cNvPr id="18" name="ANS_150"/>
           <p:cNvSpPr txBox="1"/>
           <p:nvPr/>
         </p:nvSpPr>
@@ -12547,7 +12722,7 @@
       </p:sp>
       <p:sp>
         <p:nvSpPr>
-          <p:cNvPr id="19" name="ANS_149"/>
+          <p:cNvPr id="19" name="ANS_151"/>
           <p:cNvSpPr txBox="1"/>
           <p:nvPr/>
         </p:nvSpPr>
@@ -12586,7 +12761,7 @@
       </p:sp>
       <p:sp>
         <p:nvSpPr>
-          <p:cNvPr id="20" name="ANS_150"/>
+          <p:cNvPr id="20" name="ANS_152"/>
           <p:cNvSpPr/>
           <p:nvPr/>
         </p:nvSpPr>
@@ -12606,7 +12781,7 @@
       </p:sp>
       <p:sp>
         <p:nvSpPr>
-          <p:cNvPr id="21" name="ANS_151"/>
+          <p:cNvPr id="21" name="ANS_153"/>
           <p:cNvSpPr txBox="1"/>
           <p:nvPr/>
         </p:nvSpPr>
@@ -12667,7 +12842,7 @@
       </p:sp>
       <p:sp>
         <p:nvSpPr>
-          <p:cNvPr id="22" name="ANS_152"/>
+          <p:cNvPr id="22" name="ANS_154"/>
           <p:cNvSpPr/>
           <p:nvPr/>
         </p:nvSpPr>
@@ -12687,7 +12862,7 @@
       </p:sp>
       <p:sp>
         <p:nvSpPr>
-          <p:cNvPr id="23" name="ANS_153"/>
+          <p:cNvPr id="23" name="ANS_155"/>
           <p:cNvSpPr txBox="1"/>
           <p:nvPr/>
         </p:nvSpPr>
@@ -12726,7 +12901,7 @@
       </p:sp>
       <p:sp>
         <p:nvSpPr>
-          <p:cNvPr id="24" name="ANS_154"/>
+          <p:cNvPr id="24" name="ANS_156"/>
           <p:cNvSpPr/>
           <p:nvPr/>
         </p:nvSpPr>
@@ -12746,7 +12921,7 @@
       </p:sp>
       <p:sp>
         <p:nvSpPr>
-          <p:cNvPr id="25" name="ANS_155"/>
+          <p:cNvPr id="25" name="ANS_157"/>
           <p:cNvSpPr txBox="1"/>
           <p:nvPr/>
         </p:nvSpPr>
@@ -13831,7 +14006,7 @@
       </p:sp>
       <p:sp>
         <p:nvSpPr>
-          <p:cNvPr id="19" name="ANS_156"/>
+          <p:cNvPr id="19" name="ANS_158"/>
           <p:cNvSpPr/>
           <p:nvPr/>
         </p:nvSpPr>
@@ -13856,7 +14031,7 @@
       </p:sp>
       <p:sp>
         <p:nvSpPr>
-          <p:cNvPr id="20" name="ANS_157"/>
+          <p:cNvPr id="20" name="ANS_159"/>
           <p:cNvSpPr/>
           <p:nvPr/>
         </p:nvSpPr>
@@ -13883,7 +14058,7 @@
       </p:sp>
       <p:sp>
         <p:nvSpPr>
-          <p:cNvPr id="21" name="ANS_158"/>
+          <p:cNvPr id="21" name="ANS_160"/>
           <p:cNvSpPr txBox="1"/>
           <p:nvPr/>
         </p:nvSpPr>
@@ -13922,7 +14097,7 @@
       </p:sp>
       <p:sp>
         <p:nvSpPr>
-          <p:cNvPr id="22" name="ANS_159"/>
+          <p:cNvPr id="22" name="ANS_161"/>
           <p:cNvSpPr txBox="1"/>
           <p:nvPr/>
         </p:nvSpPr>
@@ -13961,7 +14136,7 @@
       </p:sp>
       <p:sp>
         <p:nvSpPr>
-          <p:cNvPr id="23" name="ANS_160"/>
+          <p:cNvPr id="23" name="ANS_162"/>
           <p:cNvSpPr txBox="1"/>
           <p:nvPr/>
         </p:nvSpPr>
@@ -14000,7 +14175,7 @@
       </p:sp>
       <p:sp>
         <p:nvSpPr>
-          <p:cNvPr id="24" name="ANS_161"/>
+          <p:cNvPr id="24" name="ANS_163"/>
           <p:cNvSpPr/>
           <p:nvPr/>
         </p:nvSpPr>
@@ -14020,7 +14195,7 @@
       </p:sp>
       <p:sp>
         <p:nvSpPr>
-          <p:cNvPr id="25" name="ANS_162"/>
+          <p:cNvPr id="25" name="ANS_164"/>
           <p:cNvSpPr txBox="1"/>
           <p:nvPr/>
         </p:nvSpPr>
@@ -14059,7 +14234,7 @@
       </p:sp>
       <p:sp>
         <p:nvSpPr>
-          <p:cNvPr id="26" name="ANS_163"/>
+          <p:cNvPr id="26" name="ANS_165"/>
           <p:cNvSpPr/>
           <p:nvPr/>
         </p:nvSpPr>
@@ -14079,7 +14254,7 @@
       </p:sp>
       <p:sp>
         <p:nvSpPr>
-          <p:cNvPr id="27" name="ANS_164"/>
+          <p:cNvPr id="27" name="ANS_166"/>
           <p:cNvSpPr txBox="1"/>
           <p:nvPr/>
         </p:nvSpPr>
@@ -14118,7 +14293,7 @@
       </p:sp>
       <p:sp>
         <p:nvSpPr>
-          <p:cNvPr id="28" name="ANS_165"/>
+          <p:cNvPr id="28" name="ANS_167"/>
           <p:cNvSpPr/>
           <p:nvPr/>
         </p:nvSpPr>
@@ -14138,7 +14313,7 @@
       </p:sp>
       <p:sp>
         <p:nvSpPr>
-          <p:cNvPr id="29" name="ANS_166"/>
+          <p:cNvPr id="29" name="ANS_168"/>
           <p:cNvSpPr txBox="1"/>
           <p:nvPr/>
         </p:nvSpPr>
@@ -15416,7 +15591,7 @@
       </p:sp>
       <p:sp>
         <p:nvSpPr>
-          <p:cNvPr id="19" name="ANS_167"/>
+          <p:cNvPr id="19" name="ANS_169"/>
           <p:cNvSpPr/>
           <p:nvPr/>
         </p:nvSpPr>
@@ -15441,7 +15616,7 @@
       </p:sp>
       <p:sp>
         <p:nvSpPr>
-          <p:cNvPr id="20" name="ANS_168"/>
+          <p:cNvPr id="20" name="ANS_170"/>
           <p:cNvSpPr/>
           <p:nvPr/>
         </p:nvSpPr>
@@ -15468,7 +15643,7 @@
       </p:sp>
       <p:sp>
         <p:nvSpPr>
-          <p:cNvPr id="21" name="ANS_169"/>
+          <p:cNvPr id="21" name="ANS_171"/>
           <p:cNvSpPr txBox="1"/>
           <p:nvPr/>
         </p:nvSpPr>
@@ -15507,7 +15682,7 @@
       </p:sp>
       <p:sp>
         <p:nvSpPr>
-          <p:cNvPr id="22" name="ANS_170"/>
+          <p:cNvPr id="22" name="ANS_172"/>
           <p:cNvSpPr txBox="1"/>
           <p:nvPr/>
         </p:nvSpPr>
@@ -15546,7 +15721,7 @@
       </p:sp>
       <p:sp>
         <p:nvSpPr>
-          <p:cNvPr id="23" name="ANS_171"/>
+          <p:cNvPr id="23" name="ANS_173"/>
           <p:cNvSpPr txBox="1"/>
           <p:nvPr/>
         </p:nvSpPr>
@@ -15585,7 +15760,7 @@
       </p:sp>
       <p:sp>
         <p:nvSpPr>
-          <p:cNvPr id="24" name="ANS_172"/>
+          <p:cNvPr id="24" name="ANS_174"/>
           <p:cNvSpPr/>
           <p:nvPr/>
         </p:nvSpPr>
@@ -15605,7 +15780,7 @@
       </p:sp>
       <p:sp>
         <p:nvSpPr>
-          <p:cNvPr id="25" name="ANS_173"/>
+          <p:cNvPr id="25" name="ANS_175"/>
           <p:cNvSpPr txBox="1"/>
           <p:nvPr/>
         </p:nvSpPr>
@@ -15644,7 +15819,7 @@
       </p:sp>
       <p:sp>
         <p:nvSpPr>
-          <p:cNvPr id="26" name="ANS_174"/>
+          <p:cNvPr id="26" name="ANS_176"/>
           <p:cNvSpPr/>
           <p:nvPr/>
         </p:nvSpPr>
@@ -15664,7 +15839,7 @@
       </p:sp>
       <p:sp>
         <p:nvSpPr>
-          <p:cNvPr id="27" name="ANS_175"/>
+          <p:cNvPr id="27" name="ANS_177"/>
           <p:cNvSpPr txBox="1"/>
           <p:nvPr/>
         </p:nvSpPr>
@@ -16699,7 +16874,7 @@
       </p:sp>
       <p:sp>
         <p:nvSpPr>
-          <p:cNvPr id="19" name="ANS_176"/>
+          <p:cNvPr id="19" name="ANS_178"/>
           <p:cNvSpPr/>
           <p:nvPr/>
         </p:nvSpPr>
@@ -16724,7 +16899,7 @@
       </p:sp>
       <p:sp>
         <p:nvSpPr>
-          <p:cNvPr id="20" name="ANS_177"/>
+          <p:cNvPr id="20" name="ANS_179"/>
           <p:cNvSpPr/>
           <p:nvPr/>
         </p:nvSpPr>
@@ -16751,7 +16926,7 @@
       </p:sp>
       <p:sp>
         <p:nvSpPr>
-          <p:cNvPr id="21" name="ANS_178"/>
+          <p:cNvPr id="21" name="ANS_180"/>
           <p:cNvSpPr txBox="1"/>
           <p:nvPr/>
         </p:nvSpPr>
@@ -16790,7 +16965,7 @@
       </p:sp>
       <p:sp>
         <p:nvSpPr>
-          <p:cNvPr id="22" name="ANS_179"/>
+          <p:cNvPr id="22" name="ANS_181"/>
           <p:cNvSpPr txBox="1"/>
           <p:nvPr/>
         </p:nvSpPr>
@@ -16829,7 +17004,7 @@
       </p:sp>
       <p:sp>
         <p:nvSpPr>
-          <p:cNvPr id="23" name="ANS_180"/>
+          <p:cNvPr id="23" name="ANS_182"/>
           <p:cNvSpPr txBox="1"/>
           <p:nvPr/>
         </p:nvSpPr>
@@ -16868,7 +17043,7 @@
       </p:sp>
       <p:sp>
         <p:nvSpPr>
-          <p:cNvPr id="24" name="ANS_181"/>
+          <p:cNvPr id="24" name="ANS_183"/>
           <p:cNvSpPr/>
           <p:nvPr/>
         </p:nvSpPr>
@@ -16888,7 +17063,7 @@
       </p:sp>
       <p:sp>
         <p:nvSpPr>
-          <p:cNvPr id="25" name="ANS_182"/>
+          <p:cNvPr id="25" name="ANS_184"/>
           <p:cNvSpPr txBox="1"/>
           <p:nvPr/>
         </p:nvSpPr>
@@ -16927,7 +17102,7 @@
       </p:sp>
       <p:sp>
         <p:nvSpPr>
-          <p:cNvPr id="26" name="ANS_183"/>
+          <p:cNvPr id="26" name="ANS_185"/>
           <p:cNvSpPr/>
           <p:nvPr/>
         </p:nvSpPr>
@@ -16947,7 +17122,7 @@
       </p:sp>
       <p:sp>
         <p:nvSpPr>
-          <p:cNvPr id="27" name="ANS_184"/>
+          <p:cNvPr id="27" name="ANS_186"/>
           <p:cNvSpPr txBox="1"/>
           <p:nvPr/>
         </p:nvSpPr>
@@ -18070,7 +18245,7 @@
       </p:sp>
       <p:sp>
         <p:nvSpPr>
-          <p:cNvPr id="19" name="ANS_185"/>
+          <p:cNvPr id="19" name="ANS_187"/>
           <p:cNvSpPr/>
           <p:nvPr/>
         </p:nvSpPr>
@@ -18095,7 +18270,7 @@
       </p:sp>
       <p:sp>
         <p:nvSpPr>
-          <p:cNvPr id="20" name="ANS_186"/>
+          <p:cNvPr id="20" name="ANS_188"/>
           <p:cNvSpPr/>
           <p:nvPr/>
         </p:nvSpPr>
@@ -18122,7 +18297,7 @@
       </p:sp>
       <p:sp>
         <p:nvSpPr>
-          <p:cNvPr id="21" name="ANS_187"/>
+          <p:cNvPr id="21" name="ANS_189"/>
           <p:cNvSpPr txBox="1"/>
           <p:nvPr/>
         </p:nvSpPr>
@@ -18161,7 +18336,7 @@
       </p:sp>
       <p:sp>
         <p:nvSpPr>
-          <p:cNvPr id="22" name="ANS_188"/>
+          <p:cNvPr id="22" name="ANS_190"/>
           <p:cNvSpPr txBox="1"/>
           <p:nvPr/>
         </p:nvSpPr>
@@ -18200,7 +18375,7 @@
       </p:sp>
       <p:sp>
         <p:nvSpPr>
-          <p:cNvPr id="23" name="ANS_189"/>
+          <p:cNvPr id="23" name="ANS_191"/>
           <p:cNvSpPr txBox="1"/>
           <p:nvPr/>
         </p:nvSpPr>
@@ -18239,7 +18414,7 @@
       </p:sp>
       <p:sp>
         <p:nvSpPr>
-          <p:cNvPr id="24" name="ANS_190"/>
+          <p:cNvPr id="24" name="ANS_192"/>
           <p:cNvSpPr/>
           <p:nvPr/>
         </p:nvSpPr>
@@ -18259,7 +18434,7 @@
       </p:sp>
       <p:sp>
         <p:nvSpPr>
-          <p:cNvPr id="25" name="ANS_191"/>
+          <p:cNvPr id="25" name="ANS_193"/>
           <p:cNvSpPr txBox="1"/>
           <p:nvPr/>
         </p:nvSpPr>
@@ -18364,7 +18539,7 @@
       </p:sp>
       <p:sp>
         <p:nvSpPr>
-          <p:cNvPr id="26" name="ANS_192"/>
+          <p:cNvPr id="26" name="ANS_194"/>
           <p:cNvSpPr/>
           <p:nvPr/>
         </p:nvSpPr>
@@ -18384,7 +18559,7 @@
       </p:sp>
       <p:sp>
         <p:nvSpPr>
-          <p:cNvPr id="27" name="ANS_193"/>
+          <p:cNvPr id="27" name="ANS_195"/>
           <p:cNvSpPr txBox="1"/>
           <p:nvPr/>
         </p:nvSpPr>
@@ -18423,7 +18598,7 @@
       </p:sp>
       <p:sp>
         <p:nvSpPr>
-          <p:cNvPr id="28" name="ANS_194"/>
+          <p:cNvPr id="28" name="ANS_196"/>
           <p:cNvSpPr/>
           <p:nvPr/>
         </p:nvSpPr>
@@ -18443,7 +18618,7 @@
       </p:sp>
       <p:sp>
         <p:nvSpPr>
-          <p:cNvPr id="29" name="ANS_195"/>
+          <p:cNvPr id="29" name="ANS_197"/>
           <p:cNvSpPr txBox="1"/>
           <p:nvPr/>
         </p:nvSpPr>
@@ -19660,7 +19835,7 @@
       </p:sp>
       <p:sp>
         <p:nvSpPr>
-          <p:cNvPr id="19" name="ANS_196"/>
+          <p:cNvPr id="19" name="ANS_198"/>
           <p:cNvSpPr/>
           <p:nvPr/>
         </p:nvSpPr>
@@ -19685,7 +19860,7 @@
       </p:sp>
       <p:sp>
         <p:nvSpPr>
-          <p:cNvPr id="20" name="ANS_197"/>
+          <p:cNvPr id="20" name="ANS_199"/>
           <p:cNvSpPr/>
           <p:nvPr/>
         </p:nvSpPr>
@@ -19712,7 +19887,7 @@
       </p:sp>
       <p:sp>
         <p:nvSpPr>
-          <p:cNvPr id="21" name="ANS_198"/>
+          <p:cNvPr id="21" name="ANS_200"/>
           <p:cNvSpPr txBox="1"/>
           <p:nvPr/>
         </p:nvSpPr>
@@ -19751,7 +19926,7 @@
       </p:sp>
       <p:sp>
         <p:nvSpPr>
-          <p:cNvPr id="22" name="ANS_199"/>
+          <p:cNvPr id="22" name="ANS_201"/>
           <p:cNvSpPr txBox="1"/>
           <p:nvPr/>
         </p:nvSpPr>
@@ -19790,7 +19965,7 @@
       </p:sp>
       <p:sp>
         <p:nvSpPr>
-          <p:cNvPr id="23" name="ANS_200"/>
+          <p:cNvPr id="23" name="ANS_202"/>
           <p:cNvSpPr txBox="1"/>
           <p:nvPr/>
         </p:nvSpPr>
@@ -19829,7 +20004,7 @@
       </p:sp>
       <p:sp>
         <p:nvSpPr>
-          <p:cNvPr id="24" name="ANS_201"/>
+          <p:cNvPr id="24" name="ANS_203"/>
           <p:cNvSpPr/>
           <p:nvPr/>
         </p:nvSpPr>
@@ -19849,7 +20024,7 @@
       </p:sp>
       <p:sp>
         <p:nvSpPr>
-          <p:cNvPr id="25" name="ANS_202"/>
+          <p:cNvPr id="25" name="ANS_204"/>
           <p:cNvSpPr txBox="1"/>
           <p:nvPr/>
         </p:nvSpPr>
@@ -20790,7 +20965,7 @@
       </p:sp>
       <p:sp>
         <p:nvSpPr>
-          <p:cNvPr id="19" name="ANS_203"/>
+          <p:cNvPr id="19" name="ANS_205"/>
           <p:cNvSpPr/>
           <p:nvPr/>
         </p:nvSpPr>
@@ -20815,7 +20990,7 @@
       </p:sp>
       <p:sp>
         <p:nvSpPr>
-          <p:cNvPr id="20" name="ANS_204"/>
+          <p:cNvPr id="20" name="ANS_206"/>
           <p:cNvSpPr/>
           <p:nvPr/>
         </p:nvSpPr>
@@ -20840,7 +21015,7 @@
       </p:sp>
       <p:sp>
         <p:nvSpPr>
-          <p:cNvPr id="21" name="ANS_205"/>
+          <p:cNvPr id="21" name="ANS_207"/>
           <p:cNvSpPr/>
           <p:nvPr/>
         </p:nvSpPr>
@@ -20867,7 +21042,7 @@
       </p:sp>
       <p:sp>
         <p:nvSpPr>
-          <p:cNvPr id="22" name="ANS_206"/>
+          <p:cNvPr id="22" name="ANS_208"/>
           <p:cNvSpPr txBox="1"/>
           <p:nvPr/>
         </p:nvSpPr>
@@ -20906,7 +21081,7 @@
       </p:sp>
       <p:sp>
         <p:nvSpPr>
-          <p:cNvPr id="23" name="ANS_207"/>
+          <p:cNvPr id="23" name="ANS_209"/>
           <p:cNvSpPr txBox="1"/>
           <p:nvPr/>
         </p:nvSpPr>
@@ -20945,7 +21120,7 @@
       </p:sp>
       <p:sp>
         <p:nvSpPr>
-          <p:cNvPr id="24" name="ANS_208"/>
+          <p:cNvPr id="24" name="ANS_210"/>
           <p:cNvSpPr txBox="1"/>
           <p:nvPr/>
         </p:nvSpPr>
@@ -20984,7 +21159,7 @@
       </p:sp>
       <p:sp>
         <p:nvSpPr>
-          <p:cNvPr id="25" name="ANS_209"/>
+          <p:cNvPr id="25" name="ANS_211"/>
           <p:cNvSpPr/>
           <p:nvPr/>
         </p:nvSpPr>
@@ -21004,7 +21179,7 @@
       </p:sp>
       <p:sp>
         <p:nvSpPr>
-          <p:cNvPr id="26" name="ANS_210"/>
+          <p:cNvPr id="26" name="ANS_212"/>
           <p:cNvSpPr txBox="1"/>
           <p:nvPr/>
         </p:nvSpPr>
@@ -21043,7 +21218,7 @@
       </p:sp>
       <p:sp>
         <p:nvSpPr>
-          <p:cNvPr id="27" name="ANS_211"/>
+          <p:cNvPr id="27" name="ANS_213"/>
           <p:cNvSpPr/>
           <p:nvPr/>
         </p:nvSpPr>
@@ -21063,7 +21238,7 @@
       </p:sp>
       <p:sp>
         <p:nvSpPr>
-          <p:cNvPr id="28" name="ANS_212"/>
+          <p:cNvPr id="28" name="ANS_214"/>
           <p:cNvSpPr txBox="1"/>
           <p:nvPr/>
         </p:nvSpPr>
@@ -21102,7 +21277,7 @@
       </p:sp>
       <p:sp>
         <p:nvSpPr>
-          <p:cNvPr id="29" name="ANS_213"/>
+          <p:cNvPr id="29" name="ANS_215"/>
           <p:cNvSpPr/>
           <p:nvPr/>
         </p:nvSpPr>
@@ -21122,7 +21297,7 @@
       </p:sp>
       <p:sp>
         <p:nvSpPr>
-          <p:cNvPr id="30" name="ANS_214"/>
+          <p:cNvPr id="30" name="ANS_216"/>
           <p:cNvSpPr txBox="1"/>
           <p:nvPr/>
         </p:nvSpPr>
@@ -21161,7 +21336,7 @@
       </p:sp>
       <p:sp>
         <p:nvSpPr>
-          <p:cNvPr id="31" name="ANS_215"/>
+          <p:cNvPr id="31" name="ANS_217"/>
           <p:cNvSpPr/>
           <p:nvPr/>
         </p:nvSpPr>
@@ -21181,7 +21356,7 @@
       </p:sp>
       <p:sp>
         <p:nvSpPr>
-          <p:cNvPr id="32" name="ANS_216"/>
+          <p:cNvPr id="32" name="ANS_218"/>
           <p:cNvSpPr txBox="1"/>
           <p:nvPr/>
         </p:nvSpPr>
@@ -21982,7 +22157,7 @@
       </p:sp>
       <p:sp>
         <p:nvSpPr>
-          <p:cNvPr id="7" name="ANS_217"/>
+          <p:cNvPr id="7" name="ANS_219"/>
           <p:cNvSpPr/>
           <p:nvPr/>
         </p:nvSpPr>
@@ -22009,7 +22184,7 @@
       </p:sp>
       <p:sp>
         <p:nvSpPr>
-          <p:cNvPr id="8" name="ANS_218"/>
+          <p:cNvPr id="8" name="ANS_220"/>
           <p:cNvSpPr txBox="1"/>
           <p:nvPr/>
         </p:nvSpPr>
@@ -22048,7 +22223,7 @@
       </p:sp>
       <p:sp>
         <p:nvSpPr>
-          <p:cNvPr id="9" name="ANS_219"/>
+          <p:cNvPr id="9" name="ANS_221"/>
           <p:cNvSpPr txBox="1"/>
           <p:nvPr/>
         </p:nvSpPr>
@@ -22087,7 +22262,7 @@
       </p:sp>
       <p:sp>
         <p:nvSpPr>
-          <p:cNvPr id="10" name="ANS_220"/>
+          <p:cNvPr id="10" name="ANS_222"/>
           <p:cNvSpPr txBox="1"/>
           <p:nvPr/>
         </p:nvSpPr>
@@ -22126,7 +22301,7 @@
       </p:sp>
       <p:sp>
         <p:nvSpPr>
-          <p:cNvPr id="11" name="ANS_221"/>
+          <p:cNvPr id="11" name="ANS_223"/>
           <p:cNvSpPr/>
           <p:nvPr/>
         </p:nvSpPr>
@@ -22146,7 +22321,7 @@
       </p:sp>
       <p:sp>
         <p:nvSpPr>
-          <p:cNvPr id="12" name="ANS_222"/>
+          <p:cNvPr id="12" name="ANS_224"/>
           <p:cNvSpPr txBox="1"/>
           <p:nvPr/>
         </p:nvSpPr>
@@ -22185,7 +22360,7 @@
       </p:sp>
       <p:sp>
         <p:nvSpPr>
-          <p:cNvPr id="13" name="ANS_223"/>
+          <p:cNvPr id="13" name="ANS_225"/>
           <p:cNvSpPr/>
           <p:nvPr/>
         </p:nvSpPr>
@@ -22205,7 +22380,7 @@
       </p:sp>
       <p:sp>
         <p:nvSpPr>
-          <p:cNvPr id="14" name="ANS_224"/>
+          <p:cNvPr id="14" name="ANS_226"/>
           <p:cNvSpPr txBox="1"/>
           <p:nvPr/>
         </p:nvSpPr>
@@ -22244,7 +22419,7 @@
       </p:sp>
       <p:sp>
         <p:nvSpPr>
-          <p:cNvPr id="15" name="ANS_225"/>
+          <p:cNvPr id="15" name="ANS_227"/>
           <p:cNvSpPr/>
           <p:nvPr/>
         </p:nvSpPr>
@@ -22264,7 +22439,7 @@
       </p:sp>
       <p:sp>
         <p:nvSpPr>
-          <p:cNvPr id="16" name="ANS_226"/>
+          <p:cNvPr id="16" name="ANS_228"/>
           <p:cNvSpPr txBox="1"/>
           <p:nvPr/>
         </p:nvSpPr>
@@ -22303,7 +22478,7 @@
       </p:sp>
       <p:sp>
         <p:nvSpPr>
-          <p:cNvPr id="17" name="ANS_227"/>
+          <p:cNvPr id="17" name="ANS_229"/>
           <p:cNvSpPr/>
           <p:nvPr/>
         </p:nvSpPr>
@@ -22323,7 +22498,7 @@
       </p:sp>
       <p:sp>
         <p:nvSpPr>
-          <p:cNvPr id="18" name="ANS_228"/>
+          <p:cNvPr id="18" name="ANS_230"/>
           <p:cNvSpPr txBox="1"/>
           <p:nvPr/>
         </p:nvSpPr>
@@ -23052,7 +23227,7 @@
       </p:sp>
       <p:sp>
         <p:nvSpPr>
-          <p:cNvPr id="7" name="ANS_229"/>
+          <p:cNvPr id="7" name="ANS_231"/>
           <p:cNvSpPr/>
           <p:nvPr/>
         </p:nvSpPr>
@@ -23079,7 +23254,7 @@
       </p:sp>
       <p:sp>
         <p:nvSpPr>
-          <p:cNvPr id="8" name="ANS_230"/>
+          <p:cNvPr id="8" name="ANS_232"/>
           <p:cNvSpPr txBox="1"/>
           <p:nvPr/>
         </p:nvSpPr>
@@ -23118,7 +23293,7 @@
       </p:sp>
       <p:sp>
         <p:nvSpPr>
-          <p:cNvPr id="9" name="ANS_231"/>
+          <p:cNvPr id="9" name="ANS_233"/>
           <p:cNvSpPr txBox="1"/>
           <p:nvPr/>
         </p:nvSpPr>
@@ -23157,7 +23332,7 @@
       </p:sp>
       <p:sp>
         <p:nvSpPr>
-          <p:cNvPr id="10" name="ANS_232"/>
+          <p:cNvPr id="10" name="ANS_234"/>
           <p:cNvSpPr txBox="1"/>
           <p:nvPr/>
         </p:nvSpPr>
@@ -23196,7 +23371,7 @@
       </p:sp>
       <p:sp>
         <p:nvSpPr>
-          <p:cNvPr id="11" name="ANS_233"/>
+          <p:cNvPr id="11" name="ANS_235"/>
           <p:cNvSpPr/>
           <p:nvPr/>
         </p:nvSpPr>
@@ -23216,7 +23391,7 @@
       </p:sp>
       <p:sp>
         <p:nvSpPr>
-          <p:cNvPr id="12" name="ANS_234"/>
+          <p:cNvPr id="12" name="ANS_236"/>
           <p:cNvSpPr txBox="1"/>
           <p:nvPr/>
         </p:nvSpPr>
@@ -23255,7 +23430,7 @@
       </p:sp>
       <p:sp>
         <p:nvSpPr>
-          <p:cNvPr id="13" name="ANS_235"/>
+          <p:cNvPr id="13" name="ANS_237"/>
           <p:cNvSpPr/>
           <p:nvPr/>
         </p:nvSpPr>
@@ -23275,7 +23450,7 @@
       </p:sp>
       <p:sp>
         <p:nvSpPr>
-          <p:cNvPr id="14" name="ANS_236"/>
+          <p:cNvPr id="14" name="ANS_238"/>
           <p:cNvSpPr txBox="1"/>
           <p:nvPr/>
         </p:nvSpPr>
@@ -23314,7 +23489,7 @@
       </p:sp>
       <p:sp>
         <p:nvSpPr>
-          <p:cNvPr id="15" name="ANS_237"/>
+          <p:cNvPr id="15" name="ANS_239"/>
           <p:cNvSpPr/>
           <p:nvPr/>
         </p:nvSpPr>
@@ -23334,7 +23509,7 @@
       </p:sp>
       <p:sp>
         <p:nvSpPr>
-          <p:cNvPr id="16" name="ANS_238"/>
+          <p:cNvPr id="16" name="ANS_240"/>
           <p:cNvSpPr txBox="1"/>
           <p:nvPr/>
         </p:nvSpPr>
@@ -23373,7 +23548,7 @@
       </p:sp>
       <p:sp>
         <p:nvSpPr>
-          <p:cNvPr id="17" name="ANS_239"/>
+          <p:cNvPr id="17" name="ANS_241"/>
           <p:cNvSpPr/>
           <p:nvPr/>
         </p:nvSpPr>
@@ -23393,7 +23568,7 @@
       </p:sp>
       <p:sp>
         <p:nvSpPr>
-          <p:cNvPr id="18" name="ANS_240"/>
+          <p:cNvPr id="18" name="ANS_242"/>
           <p:cNvSpPr txBox="1"/>
           <p:nvPr/>
         </p:nvSpPr>
@@ -23432,7 +23607,7 @@
       </p:sp>
       <p:sp>
         <p:nvSpPr>
-          <p:cNvPr id="19" name="ANS_241"/>
+          <p:cNvPr id="19" name="ANS_243"/>
           <p:cNvSpPr/>
           <p:nvPr/>
         </p:nvSpPr>
@@ -23452,7 +23627,7 @@
       </p:sp>
       <p:sp>
         <p:nvSpPr>
-          <p:cNvPr id="20" name="ANS_242"/>
+          <p:cNvPr id="20" name="ANS_244"/>
           <p:cNvSpPr txBox="1"/>
           <p:nvPr/>
         </p:nvSpPr>

--- a/courseware/202609_DSA_MOOC_Quiz_CH09-10.pptx
+++ b/courseware/202609_DSA_MOOC_Quiz_CH09-10.pptx
@@ -9061,7 +9061,7 @@
         <p:spPr>
           <a:xfrm>
             <a:off x="548640" y="1645920"/>
-            <a:ext cx="6309360" cy="1395984"/>
+            <a:ext cx="6309360" cy="1731264"/>
           </a:xfrm>
           <a:prstGeom prst="rect">
             <a:avLst/>
@@ -9162,6 +9162,50 @@
                 <a:ea typeface="Microsoft YaHei" pitchFamily="34" charset="-122"/>
                 <a:cs typeface="Microsoft YaHei" pitchFamily="34" charset="-120"/>
               </a:rPr>
+              <a:t>n−1</a:t>
+            </a:r>
+            <a:r>
+              <a:rPr lang="en-US" sz="2000" dirty="0">
+                <a:solidFill>
+                  <a:srgbClr val="222222"/>
+                </a:solidFill>
+                <a:latin typeface="Microsoft YaHei" pitchFamily="34" charset="0"/>
+                <a:ea typeface="Microsoft YaHei" pitchFamily="34" charset="-122"/>
+                <a:cs typeface="Microsoft YaHei" pitchFamily="34" charset="-120"/>
+              </a:rPr>
+              <a:t> = 1/2</a:t>
+            </a:r>
+            <a:r>
+              <a:rPr lang="en-US" sz="2000" baseline="30000" dirty="0">
+                <a:solidFill>
+                  <a:srgbClr val="222222"/>
+                </a:solidFill>
+                <a:latin typeface="Microsoft YaHei" pitchFamily="34" charset="0"/>
+                <a:ea typeface="Microsoft YaHei" pitchFamily="34" charset="-122"/>
+                <a:cs typeface="Microsoft YaHei" pitchFamily="34" charset="-120"/>
+              </a:rPr>
+              <a:t>n−1</a:t>
+            </a:r>
+            <a:r>
+              <a:rPr lang="en-US" sz="2000" dirty="0">
+                <a:solidFill>
+                  <a:srgbClr val="222222"/>
+                </a:solidFill>
+                <a:latin typeface="Microsoft YaHei" pitchFamily="34" charset="0"/>
+                <a:ea typeface="Microsoft YaHei" pitchFamily="34" charset="-122"/>
+                <a:cs typeface="Microsoft YaHei" pitchFamily="34" charset="-120"/>
+              </a:rPr>
+              <a:t>，P</a:t>
+            </a:r>
+            <a:r>
+              <a:rPr lang="en-US" sz="2000" baseline="-40000" dirty="0">
+                <a:solidFill>
+                  <a:srgbClr val="222222"/>
+                </a:solidFill>
+                <a:latin typeface="Microsoft YaHei" pitchFamily="34" charset="0"/>
+                <a:ea typeface="Microsoft YaHei" pitchFamily="34" charset="-122"/>
+                <a:cs typeface="Microsoft YaHei" pitchFamily="34" charset="-120"/>
+              </a:rPr>
               <a:t>n</a:t>
             </a:r>
             <a:r>
@@ -9184,7 +9228,7 @@
                 <a:ea typeface="Microsoft YaHei" pitchFamily="34" charset="-122"/>
                 <a:cs typeface="Microsoft YaHei" pitchFamily="34" charset="-120"/>
               </a:rPr>
-              <a:t>n</a:t>
+              <a:t>n−1</a:t>
             </a:r>
             <a:r>
               <a:rPr lang="en-US" sz="2000" dirty="0">
@@ -9195,7 +9239,7 @@
                 <a:ea typeface="Microsoft YaHei" pitchFamily="34" charset="-122"/>
                 <a:cs typeface="Microsoft YaHei" pitchFamily="34" charset="-120"/>
               </a:rPr>
-              <a:t>。当 n → ∞ 时，成功检索的平均检索长度（ASL）的极限是：</a:t>
+              <a:t>（概率之和为 1）。当 n → ∞ 时，成功检索的平均检索长度（ASL）的极限是：</a:t>
             </a:r>
             <a:endParaRPr lang="en-US" sz="2000" dirty="0"/>
           </a:p>
@@ -9209,7 +9253,7 @@
         </p:nvSpPr>
         <p:spPr>
           <a:xfrm>
-            <a:off x="548640" y="3371088"/>
+            <a:off x="548640" y="3706368"/>
             <a:ext cx="384048" cy="384048"/>
           </a:xfrm>
           <a:prstGeom prst="ellipse">
@@ -9229,7 +9273,7 @@
         </p:nvSpPr>
         <p:spPr>
           <a:xfrm>
-            <a:off x="548640" y="3371088"/>
+            <a:off x="548640" y="3706368"/>
             <a:ext cx="384048" cy="384048"/>
           </a:xfrm>
           <a:prstGeom prst="rect">
@@ -9268,7 +9312,7 @@
         </p:nvSpPr>
         <p:spPr>
           <a:xfrm>
-            <a:off x="1097280" y="3297936"/>
+            <a:off x="1097280" y="3633216"/>
             <a:ext cx="5760720" cy="530352"/>
           </a:xfrm>
           <a:prstGeom prst="rect">
@@ -9307,7 +9351,7 @@
         </p:nvSpPr>
         <p:spPr>
           <a:xfrm>
-            <a:off x="548640" y="4029456"/>
+            <a:off x="548640" y="4364736"/>
             <a:ext cx="384048" cy="384048"/>
           </a:xfrm>
           <a:prstGeom prst="ellipse">
@@ -9327,7 +9371,7 @@
         </p:nvSpPr>
         <p:spPr>
           <a:xfrm>
-            <a:off x="548640" y="4029456"/>
+            <a:off x="548640" y="4364736"/>
             <a:ext cx="384048" cy="384048"/>
           </a:xfrm>
           <a:prstGeom prst="rect">
@@ -9366,7 +9410,7 @@
         </p:nvSpPr>
         <p:spPr>
           <a:xfrm>
-            <a:off x="1097280" y="3956304"/>
+            <a:off x="1097280" y="4291584"/>
             <a:ext cx="5760720" cy="530352"/>
           </a:xfrm>
           <a:prstGeom prst="rect">
@@ -9405,7 +9449,7 @@
         </p:nvSpPr>
         <p:spPr>
           <a:xfrm>
-            <a:off x="548640" y="4687824"/>
+            <a:off x="548640" y="5023104"/>
             <a:ext cx="384048" cy="384048"/>
           </a:xfrm>
           <a:prstGeom prst="ellipse">
@@ -9425,7 +9469,7 @@
         </p:nvSpPr>
         <p:spPr>
           <a:xfrm>
-            <a:off x="548640" y="4687824"/>
+            <a:off x="548640" y="5023104"/>
             <a:ext cx="384048" cy="384048"/>
           </a:xfrm>
           <a:prstGeom prst="rect">
@@ -9464,7 +9508,7 @@
         </p:nvSpPr>
         <p:spPr>
           <a:xfrm>
-            <a:off x="1097280" y="4614672"/>
+            <a:off x="1097280" y="4949952"/>
             <a:ext cx="5760720" cy="530352"/>
           </a:xfrm>
           <a:prstGeom prst="rect">
@@ -9503,7 +9547,7 @@
         </p:nvSpPr>
         <p:spPr>
           <a:xfrm>
-            <a:off x="548640" y="5346192"/>
+            <a:off x="548640" y="5681472"/>
             <a:ext cx="384048" cy="384048"/>
           </a:xfrm>
           <a:prstGeom prst="ellipse">
@@ -9523,7 +9567,7 @@
         </p:nvSpPr>
         <p:spPr>
           <a:xfrm>
-            <a:off x="548640" y="5346192"/>
+            <a:off x="548640" y="5681472"/>
             <a:ext cx="384048" cy="384048"/>
           </a:xfrm>
           <a:prstGeom prst="rect">
@@ -9562,7 +9606,7 @@
         </p:nvSpPr>
         <p:spPr>
           <a:xfrm>
-            <a:off x="1097280" y="5273040"/>
+            <a:off x="1097280" y="5608320"/>
             <a:ext cx="5760720" cy="530352"/>
           </a:xfrm>
           <a:prstGeom prst="rect">
@@ -9601,7 +9645,7 @@
         </p:nvSpPr>
         <p:spPr>
           <a:xfrm>
-            <a:off x="457200" y="3919728"/>
+            <a:off x="457200" y="4255008"/>
             <a:ext cx="6492240" cy="603504"/>
           </a:xfrm>
           <a:prstGeom prst="roundRect">
@@ -9770,7 +9814,7 @@
         </p:nvSpPr>
         <p:spPr>
           <a:xfrm>
-            <a:off x="7616952" y="2748534"/>
+            <a:off x="7616952" y="2731770"/>
             <a:ext cx="91440" cy="91440"/>
           </a:xfrm>
           <a:prstGeom prst="ellipse">
@@ -9791,7 +9835,7 @@
         <p:spPr>
           <a:xfrm>
             <a:off x="7818120" y="2651760"/>
-            <a:ext cx="3520440" cy="624840"/>
+            <a:ext cx="3520440" cy="809244"/>
           </a:xfrm>
           <a:prstGeom prst="rect">
             <a:avLst/>
@@ -9807,7 +9851,7 @@
               <a:buNone/>
             </a:pPr>
             <a:r>
-              <a:rPr lang="en-US" sz="1700" dirty="0">
+              <a:rPr lang="en-US" sz="1500" dirty="0">
                 <a:solidFill>
                   <a:srgbClr val="2B2B2B"/>
                 </a:solidFill>
@@ -9815,10 +9859,10 @@
                 <a:ea typeface="Microsoft YaHei" pitchFamily="34" charset="-122"/>
                 <a:cs typeface="Microsoft YaHei" pitchFamily="34" charset="-120"/>
               </a:rPr>
-              <a:t>找第 i 个要比较 i 次：ASL = Σ i/2</a:t>
-            </a:r>
-            <a:r>
-              <a:rPr lang="en-US" sz="1700" baseline="30000" dirty="0">
+              <a:t>找第 i 个要比较 i 次：ASL = Σ</a:t>
+            </a:r>
+            <a:r>
+              <a:rPr lang="en-US" sz="1500" baseline="-40000" dirty="0">
                 <a:solidFill>
                   <a:srgbClr val="2B2B2B"/>
                 </a:solidFill>
@@ -9826,9 +9870,86 @@
                 <a:ea typeface="Microsoft YaHei" pitchFamily="34" charset="-122"/>
                 <a:cs typeface="Microsoft YaHei" pitchFamily="34" charset="-120"/>
               </a:rPr>
+              <a:t>i&lt;n</a:t>
+            </a:r>
+            <a:r>
+              <a:rPr lang="en-US" sz="1500" dirty="0">
+                <a:solidFill>
+                  <a:srgbClr val="2B2B2B"/>
+                </a:solidFill>
+                <a:latin typeface="Microsoft YaHei" pitchFamily="34" charset="0"/>
+                <a:ea typeface="Microsoft YaHei" pitchFamily="34" charset="-122"/>
+                <a:cs typeface="Microsoft YaHei" pitchFamily="34" charset="-120"/>
+              </a:rPr>
+              <a:t> i/2</a:t>
+            </a:r>
+            <a:r>
+              <a:rPr lang="en-US" sz="1500" baseline="30000" dirty="0">
+                <a:solidFill>
+                  <a:srgbClr val="2B2B2B"/>
+                </a:solidFill>
+                <a:latin typeface="Microsoft YaHei" pitchFamily="34" charset="0"/>
+                <a:ea typeface="Microsoft YaHei" pitchFamily="34" charset="-122"/>
+                <a:cs typeface="Microsoft YaHei" pitchFamily="34" charset="-120"/>
+              </a:rPr>
               <a:t>i</a:t>
             </a:r>
-            <a:endParaRPr lang="en-US" sz="1700" dirty="0"/>
+            <a:r>
+              <a:rPr lang="en-US" sz="1500" dirty="0">
+                <a:solidFill>
+                  <a:srgbClr val="2B2B2B"/>
+                </a:solidFill>
+                <a:latin typeface="Microsoft YaHei" pitchFamily="34" charset="0"/>
+                <a:ea typeface="Microsoft YaHei" pitchFamily="34" charset="-122"/>
+                <a:cs typeface="Microsoft YaHei" pitchFamily="34" charset="-120"/>
+              </a:rPr>
+              <a:t> + n/2</a:t>
+            </a:r>
+            <a:r>
+              <a:rPr lang="en-US" sz="1500" baseline="30000" dirty="0">
+                <a:solidFill>
+                  <a:srgbClr val="2B2B2B"/>
+                </a:solidFill>
+                <a:latin typeface="Microsoft YaHei" pitchFamily="34" charset="0"/>
+                <a:ea typeface="Microsoft YaHei" pitchFamily="34" charset="-122"/>
+                <a:cs typeface="Microsoft YaHei" pitchFamily="34" charset="-120"/>
+              </a:rPr>
+              <a:t>n−1</a:t>
+            </a:r>
+            <a:r>
+              <a:rPr lang="en-US" sz="1500" dirty="0">
+                <a:solidFill>
+                  <a:srgbClr val="2B2B2B"/>
+                </a:solidFill>
+                <a:latin typeface="Microsoft YaHei" pitchFamily="34" charset="0"/>
+                <a:ea typeface="Microsoft YaHei" pitchFamily="34" charset="-122"/>
+                <a:cs typeface="Microsoft YaHei" pitchFamily="34" charset="-120"/>
+              </a:rPr>
+              <a:t> = 2 − 1/2</a:t>
+            </a:r>
+            <a:r>
+              <a:rPr lang="en-US" sz="1500" baseline="30000" dirty="0">
+                <a:solidFill>
+                  <a:srgbClr val="2B2B2B"/>
+                </a:solidFill>
+                <a:latin typeface="Microsoft YaHei" pitchFamily="34" charset="0"/>
+                <a:ea typeface="Microsoft YaHei" pitchFamily="34" charset="-122"/>
+                <a:cs typeface="Microsoft YaHei" pitchFamily="34" charset="-120"/>
+              </a:rPr>
+              <a:t>n−1</a:t>
+            </a:r>
+            <a:r>
+              <a:rPr lang="en-US" sz="1500" dirty="0">
+                <a:solidFill>
+                  <a:srgbClr val="2B2B2B"/>
+                </a:solidFill>
+                <a:latin typeface="Microsoft YaHei" pitchFamily="34" charset="0"/>
+                <a:ea typeface="Microsoft YaHei" pitchFamily="34" charset="-122"/>
+                <a:cs typeface="Microsoft YaHei" pitchFamily="34" charset="-120"/>
+              </a:rPr>
+              <a:t>（见第 22 页）</a:t>
+            </a:r>
+            <a:endParaRPr lang="en-US" sz="1500" dirty="0"/>
           </a:p>
         </p:txBody>
       </p:sp>
@@ -9840,7 +9961,7 @@
         </p:nvSpPr>
         <p:spPr>
           <a:xfrm>
-            <a:off x="7616952" y="3513277"/>
+            <a:off x="7616952" y="3664458"/>
             <a:ext cx="91440" cy="91440"/>
           </a:xfrm>
           <a:prstGeom prst="ellipse">
@@ -9860,8 +9981,8 @@
         </p:nvSpPr>
         <p:spPr>
           <a:xfrm>
-            <a:off x="7818120" y="3416503"/>
-            <a:ext cx="3520440" cy="624840"/>
+            <a:off x="7818120" y="3584448"/>
+            <a:ext cx="3520440" cy="557784"/>
           </a:xfrm>
           <a:prstGeom prst="rect">
             <a:avLst/>
@@ -9877,7 +9998,7 @@
               <a:buNone/>
             </a:pPr>
             <a:r>
-              <a:rPr lang="en-US" sz="1700" dirty="0">
+              <a:rPr lang="en-US" sz="1500" dirty="0">
                 <a:solidFill>
                   <a:srgbClr val="2B2B2B"/>
                 </a:solidFill>
@@ -9885,9 +10006,31 @@
                 <a:ea typeface="Microsoft YaHei" pitchFamily="34" charset="-122"/>
                 <a:cs typeface="Microsoft YaHei" pitchFamily="34" charset="-120"/>
               </a:rPr>
-              <a:t>S = 1/2 + 2/4 + 3/8 + …，S/2 = 1/4 + 2/8 + …</a:t>
-            </a:r>
-            <a:endParaRPr lang="en-US" sz="1700" dirty="0"/>
+              <a:t>n → ∞ 时 1/2</a:t>
+            </a:r>
+            <a:r>
+              <a:rPr lang="en-US" sz="1500" baseline="30000" dirty="0">
+                <a:solidFill>
+                  <a:srgbClr val="2B2B2B"/>
+                </a:solidFill>
+                <a:latin typeface="Microsoft YaHei" pitchFamily="34" charset="0"/>
+                <a:ea typeface="Microsoft YaHei" pitchFamily="34" charset="-122"/>
+                <a:cs typeface="Microsoft YaHei" pitchFamily="34" charset="-120"/>
+              </a:rPr>
+              <a:t>n−1</a:t>
+            </a:r>
+            <a:r>
+              <a:rPr lang="en-US" sz="1500" dirty="0">
+                <a:solidFill>
+                  <a:srgbClr val="2B2B2B"/>
+                </a:solidFill>
+                <a:latin typeface="Microsoft YaHei" pitchFamily="34" charset="0"/>
+                <a:ea typeface="Microsoft YaHei" pitchFamily="34" charset="-122"/>
+                <a:cs typeface="Microsoft YaHei" pitchFamily="34" charset="-120"/>
+              </a:rPr>
+              <a:t> → 0，极限为 2；D 只是一个接近 2 的数，不是极限。</a:t>
+            </a:r>
+            <a:endParaRPr lang="en-US" sz="1500" dirty="0"/>
           </a:p>
         </p:txBody>
       </p:sp>
@@ -9899,7 +10042,7 @@
         </p:nvSpPr>
         <p:spPr>
           <a:xfrm>
-            <a:off x="7616952" y="4278020"/>
+            <a:off x="7616952" y="4345686"/>
             <a:ext cx="91440" cy="91440"/>
           </a:xfrm>
           <a:prstGeom prst="ellipse">
@@ -9919,8 +10062,8 @@
         </p:nvSpPr>
         <p:spPr>
           <a:xfrm>
-            <a:off x="7818120" y="4181246"/>
-            <a:ext cx="3520440" cy="624840"/>
+            <a:off x="7818120" y="4265676"/>
+            <a:ext cx="3520440" cy="809244"/>
           </a:xfrm>
           <a:prstGeom prst="rect">
             <a:avLst/>
@@ -9936,7 +10079,7 @@
               <a:buNone/>
             </a:pPr>
             <a:r>
-              <a:rPr lang="en-US" sz="1700" dirty="0">
+              <a:rPr lang="en-US" sz="1500" dirty="0">
                 <a:solidFill>
                   <a:srgbClr val="2B2B2B"/>
                 </a:solidFill>
@@ -9944,9 +10087,31 @@
                 <a:ea typeface="Microsoft YaHei" pitchFamily="34" charset="-122"/>
                 <a:cs typeface="Microsoft YaHei" pitchFamily="34" charset="-120"/>
               </a:rPr>
-              <a:t>相减：S/2 = 1/2 + 1/4 + 1/8 + … = 1，所以 S = 2。</a:t>
-            </a:r>
-            <a:endParaRPr lang="en-US" sz="1700" dirty="0"/>
+              <a:t>也可直接看无穷级数 S = Σ i/2</a:t>
+            </a:r>
+            <a:r>
+              <a:rPr lang="en-US" sz="1500" baseline="30000" dirty="0">
+                <a:solidFill>
+                  <a:srgbClr val="2B2B2B"/>
+                </a:solidFill>
+                <a:latin typeface="Microsoft YaHei" pitchFamily="34" charset="0"/>
+                <a:ea typeface="Microsoft YaHei" pitchFamily="34" charset="-122"/>
+                <a:cs typeface="Microsoft YaHei" pitchFamily="34" charset="-120"/>
+              </a:rPr>
+              <a:t>i</a:t>
+            </a:r>
+            <a:r>
+              <a:rPr lang="en-US" sz="1500" dirty="0">
+                <a:solidFill>
+                  <a:srgbClr val="2B2B2B"/>
+                </a:solidFill>
+                <a:latin typeface="Microsoft YaHei" pitchFamily="34" charset="0"/>
+                <a:ea typeface="Microsoft YaHei" pitchFamily="34" charset="-122"/>
+                <a:cs typeface="Microsoft YaHei" pitchFamily="34" charset="-120"/>
+              </a:rPr>
+              <a:t>：S/2 = 1/4 + 2/8 + …，相减得 S/2 = 1/2 + 1/4 + … = 1，S = 2。</a:t>
+            </a:r>
+            <a:endParaRPr lang="en-US" sz="1500" dirty="0"/>
           </a:p>
         </p:txBody>
       </p:sp>
@@ -9958,7 +10123,7 @@
         </p:nvSpPr>
         <p:spPr>
           <a:xfrm>
-            <a:off x="7616952" y="5042764"/>
+            <a:off x="7616952" y="5278374"/>
             <a:ext cx="91440" cy="91440"/>
           </a:xfrm>
           <a:prstGeom prst="ellipse">
@@ -9978,8 +10143,8 @@
         </p:nvSpPr>
         <p:spPr>
           <a:xfrm>
-            <a:off x="7818120" y="4945990"/>
-            <a:ext cx="3520440" cy="1194816"/>
+            <a:off x="7818120" y="5198364"/>
+            <a:ext cx="3520440" cy="1060704"/>
           </a:xfrm>
           <a:prstGeom prst="rect">
             <a:avLst/>
@@ -9995,7 +10160,7 @@
               <a:buNone/>
             </a:pPr>
             <a:r>
-              <a:rPr lang="en-US" sz="1700" dirty="0">
+              <a:rPr lang="en-US" sz="1500" dirty="0">
                 <a:solidFill>
                   <a:srgbClr val="2B2B2B"/>
                 </a:solidFill>
@@ -10003,10 +10168,10 @@
                 <a:ea typeface="Microsoft YaHei" pitchFamily="34" charset="-122"/>
                 <a:cs typeface="Microsoft YaHei" pitchFamily="34" charset="-120"/>
               </a:rPr>
-              <a:t>注：有限 n 时 ΣP</a:t>
-            </a:r>
-            <a:r>
-              <a:rPr lang="en-US" sz="1700" baseline="-40000" dirty="0">
+              <a:t>注：原题 P</a:t>
+            </a:r>
+            <a:r>
+              <a:rPr lang="en-US" sz="1500" baseline="-40000" dirty="0">
                 <a:solidFill>
                   <a:srgbClr val="2B2B2B"/>
                 </a:solidFill>
@@ -10014,10 +10179,54 @@
                 <a:ea typeface="Microsoft YaHei" pitchFamily="34" charset="-122"/>
                 <a:cs typeface="Microsoft YaHei" pitchFamily="34" charset="-120"/>
               </a:rPr>
+              <a:t>n</a:t>
+            </a:r>
+            <a:r>
+              <a:rPr lang="en-US" sz="1500" dirty="0">
+                <a:solidFill>
+                  <a:srgbClr val="2B2B2B"/>
+                </a:solidFill>
+                <a:latin typeface="Microsoft YaHei" pitchFamily="34" charset="0"/>
+                <a:ea typeface="Microsoft YaHei" pitchFamily="34" charset="-122"/>
+                <a:cs typeface="Microsoft YaHei" pitchFamily="34" charset="-120"/>
+              </a:rPr>
+              <a:t> = 1/2</a:t>
+            </a:r>
+            <a:r>
+              <a:rPr lang="en-US" sz="1500" baseline="30000" dirty="0">
+                <a:solidFill>
+                  <a:srgbClr val="2B2B2B"/>
+                </a:solidFill>
+                <a:latin typeface="Microsoft YaHei" pitchFamily="34" charset="0"/>
+                <a:ea typeface="Microsoft YaHei" pitchFamily="34" charset="-122"/>
+                <a:cs typeface="Microsoft YaHei" pitchFamily="34" charset="-120"/>
+              </a:rPr>
+              <a:t>n</a:t>
+            </a:r>
+            <a:r>
+              <a:rPr lang="en-US" sz="1500" dirty="0">
+                <a:solidFill>
+                  <a:srgbClr val="2B2B2B"/>
+                </a:solidFill>
+                <a:latin typeface="Microsoft YaHei" pitchFamily="34" charset="0"/>
+                <a:ea typeface="Microsoft YaHei" pitchFamily="34" charset="-122"/>
+                <a:cs typeface="Microsoft YaHei" pitchFamily="34" charset="-120"/>
+              </a:rPr>
+              <a:t> 时 ΣP</a:t>
+            </a:r>
+            <a:r>
+              <a:rPr lang="en-US" sz="1500" baseline="-40000" dirty="0">
+                <a:solidFill>
+                  <a:srgbClr val="2B2B2B"/>
+                </a:solidFill>
+                <a:latin typeface="Microsoft YaHei" pitchFamily="34" charset="0"/>
+                <a:ea typeface="Microsoft YaHei" pitchFamily="34" charset="-122"/>
+                <a:cs typeface="Microsoft YaHei" pitchFamily="34" charset="-120"/>
+              </a:rPr>
               <a:t>i</a:t>
             </a:r>
             <a:r>
-              <a:rPr lang="en-US" sz="1700" dirty="0">
+              <a:rPr lang="en-US" sz="1500" dirty="0">
                 <a:solidFill>
                   <a:srgbClr val="2B2B2B"/>
                 </a:solidFill>
@@ -10028,7 +10237,7 @@
               <a:t> = 1 − 1/2</a:t>
             </a:r>
             <a:r>
-              <a:rPr lang="en-US" sz="1700" baseline="30000" dirty="0">
+              <a:rPr lang="en-US" sz="1500" baseline="30000" dirty="0">
                 <a:solidFill>
                   <a:srgbClr val="2B2B2B"/>
                 </a:solidFill>
@@ -10039,7 +10248,7 @@
               <a:t>n</a:t>
             </a:r>
             <a:r>
-              <a:rPr lang="en-US" sz="1700" dirty="0">
+              <a:rPr lang="en-US" sz="1500" dirty="0">
                 <a:solidFill>
                   <a:srgbClr val="2B2B2B"/>
                 </a:solidFill>
@@ -10047,9 +10256,53 @@
                 <a:ea typeface="Microsoft YaHei" pitchFamily="34" charset="-122"/>
                 <a:cs typeface="Microsoft YaHei" pitchFamily="34" charset="-120"/>
               </a:rPr>
-              <a:t> ≠ 1，题面分布不完整（原书第 10 章习题 1 同错）；不影响极限。</a:t>
-            </a:r>
-            <a:endParaRPr lang="en-US" sz="1700" dirty="0"/>
+              <a:t> ≠ 1（原书第 10 章习题 1 同错），已把 P</a:t>
+            </a:r>
+            <a:r>
+              <a:rPr lang="en-US" sz="1500" baseline="-40000" dirty="0">
+                <a:solidFill>
+                  <a:srgbClr val="2B2B2B"/>
+                </a:solidFill>
+                <a:latin typeface="Microsoft YaHei" pitchFamily="34" charset="0"/>
+                <a:ea typeface="Microsoft YaHei" pitchFamily="34" charset="-122"/>
+                <a:cs typeface="Microsoft YaHei" pitchFamily="34" charset="-120"/>
+              </a:rPr>
+              <a:t>n</a:t>
+            </a:r>
+            <a:r>
+              <a:rPr lang="en-US" sz="1500" dirty="0">
+                <a:solidFill>
+                  <a:srgbClr val="2B2B2B"/>
+                </a:solidFill>
+                <a:latin typeface="Microsoft YaHei" pitchFamily="34" charset="0"/>
+                <a:ea typeface="Microsoft YaHei" pitchFamily="34" charset="-122"/>
+                <a:cs typeface="Microsoft YaHei" pitchFamily="34" charset="-120"/>
+              </a:rPr>
+              <a:t> 改为 1/2</a:t>
+            </a:r>
+            <a:r>
+              <a:rPr lang="en-US" sz="1500" baseline="30000" dirty="0">
+                <a:solidFill>
+                  <a:srgbClr val="2B2B2B"/>
+                </a:solidFill>
+                <a:latin typeface="Microsoft YaHei" pitchFamily="34" charset="0"/>
+                <a:ea typeface="Microsoft YaHei" pitchFamily="34" charset="-122"/>
+                <a:cs typeface="Microsoft YaHei" pitchFamily="34" charset="-120"/>
+              </a:rPr>
+              <a:t>n−1</a:t>
+            </a:r>
+            <a:r>
+              <a:rPr lang="en-US" sz="1500" dirty="0">
+                <a:solidFill>
+                  <a:srgbClr val="2B2B2B"/>
+                </a:solidFill>
+                <a:latin typeface="Microsoft YaHei" pitchFamily="34" charset="0"/>
+                <a:ea typeface="Microsoft YaHei" pitchFamily="34" charset="-122"/>
+                <a:cs typeface="Microsoft YaHei" pitchFamily="34" charset="-120"/>
+              </a:rPr>
+              <a:t>；极限不变。</a:t>
+            </a:r>
+            <a:endParaRPr lang="en-US" sz="1500" dirty="0"/>
           </a:p>
         </p:txBody>
       </p:sp>
@@ -17801,7 +18054,51 @@
                 <a:ea typeface="Microsoft YaHei" pitchFamily="34" charset="-122"/>
                 <a:cs typeface="Microsoft YaHei" pitchFamily="34" charset="-120"/>
               </a:rPr>
-              <a:t>（1 ≤ i ≤ n），求平均检索长度。</a:t>
+              <a:t>（1 ≤ i ≤ n−1），p</a:t>
+            </a:r>
+            <a:r>
+              <a:rPr lang="en-US" sz="2000" baseline="-40000" dirty="0">
+                <a:solidFill>
+                  <a:srgbClr val="222222"/>
+                </a:solidFill>
+                <a:latin typeface="Microsoft YaHei" pitchFamily="34" charset="0"/>
+                <a:ea typeface="Microsoft YaHei" pitchFamily="34" charset="-122"/>
+                <a:cs typeface="Microsoft YaHei" pitchFamily="34" charset="-120"/>
+              </a:rPr>
+              <a:t>n</a:t>
+            </a:r>
+            <a:r>
+              <a:rPr lang="en-US" sz="2000" dirty="0">
+                <a:solidFill>
+                  <a:srgbClr val="222222"/>
+                </a:solidFill>
+                <a:latin typeface="Microsoft YaHei" pitchFamily="34" charset="0"/>
+                <a:ea typeface="Microsoft YaHei" pitchFamily="34" charset="-122"/>
+                <a:cs typeface="Microsoft YaHei" pitchFamily="34" charset="-120"/>
+              </a:rPr>
+              <a:t> = 2</a:t>
+            </a:r>
+            <a:r>
+              <a:rPr lang="en-US" sz="2000" baseline="30000" dirty="0">
+                <a:solidFill>
+                  <a:srgbClr val="222222"/>
+                </a:solidFill>
+                <a:latin typeface="Microsoft YaHei" pitchFamily="34" charset="0"/>
+                <a:ea typeface="Microsoft YaHei" pitchFamily="34" charset="-122"/>
+                <a:cs typeface="Microsoft YaHei" pitchFamily="34" charset="-120"/>
+              </a:rPr>
+              <a:t>−(n−1)</a:t>
+            </a:r>
+            <a:r>
+              <a:rPr lang="en-US" sz="2000" dirty="0">
+                <a:solidFill>
+                  <a:srgbClr val="222222"/>
+                </a:solidFill>
+                <a:latin typeface="Microsoft YaHei" pitchFamily="34" charset="0"/>
+                <a:ea typeface="Microsoft YaHei" pitchFamily="34" charset="-122"/>
+                <a:cs typeface="Microsoft YaHei" pitchFamily="34" charset="-120"/>
+              </a:rPr>
+              <a:t>（概率之和为 1），求平均检索长度。</a:t>
             </a:r>
             <a:endParaRPr lang="en-US" sz="2000" dirty="0"/>
           </a:p>
@@ -18251,7 +18548,7 @@
         </p:nvSpPr>
         <p:spPr>
           <a:xfrm>
-            <a:off x="457200" y="3584448"/>
+            <a:off x="457200" y="4901184"/>
             <a:ext cx="6492240" cy="603504"/>
           </a:xfrm>
           <a:prstGeom prst="roundRect">
@@ -18367,7 +18664,7 @@
                 <a:ea typeface="Microsoft YaHei" pitchFamily="34" charset="-122"/>
                 <a:cs typeface="Microsoft YaHei" pitchFamily="34" charset="-120"/>
               </a:rPr>
-              <a:t>B</a:t>
+              <a:t>D</a:t>
             </a:r>
             <a:endParaRPr lang="en-US" sz="4400" dirty="0"/>
           </a:p>
@@ -18420,7 +18717,7 @@
         </p:nvSpPr>
         <p:spPr>
           <a:xfrm>
-            <a:off x="7616952" y="2748534"/>
+            <a:off x="7616952" y="2723388"/>
             <a:ext cx="91440" cy="91440"/>
           </a:xfrm>
           <a:prstGeom prst="ellipse">
@@ -18441,7 +18738,7 @@
         <p:spPr>
           <a:xfrm>
             <a:off x="7818120" y="2651760"/>
-            <a:ext cx="3520440" cy="624840"/>
+            <a:ext cx="3520440" cy="524256"/>
           </a:xfrm>
           <a:prstGeom prst="rect">
             <a:avLst/>
@@ -18457,7 +18754,7 @@
               <a:buNone/>
             </a:pPr>
             <a:r>
-              <a:rPr lang="en-US" sz="1700" dirty="0">
+              <a:rPr lang="en-US" sz="1400" dirty="0">
                 <a:solidFill>
                   <a:srgbClr val="2B2B2B"/>
                 </a:solidFill>
@@ -18468,7 +18765,7 @@
               <a:t>ASL = Σ</a:t>
             </a:r>
             <a:r>
-              <a:rPr lang="en-US" sz="1700" baseline="-40000" dirty="0">
+              <a:rPr lang="en-US" sz="1400" baseline="-40000" dirty="0">
                 <a:solidFill>
                   <a:srgbClr val="2B2B2B"/>
                 </a:solidFill>
@@ -18476,10 +18773,10 @@
                 <a:ea typeface="Microsoft YaHei" pitchFamily="34" charset="-122"/>
                 <a:cs typeface="Microsoft YaHei" pitchFamily="34" charset="-120"/>
               </a:rPr>
-              <a:t>i=1..n</a:t>
-            </a:r>
-            <a:r>
-              <a:rPr lang="en-US" sz="1700" dirty="0">
+              <a:t>i&lt;n</a:t>
+            </a:r>
+            <a:r>
+              <a:rPr lang="en-US" sz="1400" dirty="0">
                 <a:solidFill>
                   <a:srgbClr val="2B2B2B"/>
                 </a:solidFill>
@@ -18490,7 +18787,7 @@
               <a:t> i/2</a:t>
             </a:r>
             <a:r>
-              <a:rPr lang="en-US" sz="1700" baseline="30000" dirty="0">
+              <a:rPr lang="en-US" sz="1400" baseline="30000" dirty="0">
                 <a:solidFill>
                   <a:srgbClr val="2B2B2B"/>
                 </a:solidFill>
@@ -18501,7 +18798,7 @@
               <a:t>i</a:t>
             </a:r>
             <a:r>
-              <a:rPr lang="en-US" sz="1700" dirty="0">
+              <a:rPr lang="en-US" sz="1400" dirty="0">
                 <a:solidFill>
                   <a:srgbClr val="2B2B2B"/>
                 </a:solidFill>
@@ -18509,10 +18806,10 @@
                 <a:ea typeface="Microsoft YaHei" pitchFamily="34" charset="-122"/>
                 <a:cs typeface="Microsoft YaHei" pitchFamily="34" charset="-120"/>
               </a:rPr>
-              <a:t>；错位相减得 2 − (n+2)/2</a:t>
-            </a:r>
-            <a:r>
-              <a:rPr lang="en-US" sz="1700" baseline="30000" dirty="0">
+              <a:t> + n/2</a:t>
+            </a:r>
+            <a:r>
+              <a:rPr lang="en-US" sz="1400" baseline="30000" dirty="0">
                 <a:solidFill>
                   <a:srgbClr val="2B2B2B"/>
                 </a:solidFill>
@@ -18520,10 +18817,10 @@
                 <a:ea typeface="Microsoft YaHei" pitchFamily="34" charset="-122"/>
                 <a:cs typeface="Microsoft YaHei" pitchFamily="34" charset="-120"/>
               </a:rPr>
-              <a:t>n</a:t>
-            </a:r>
-            <a:r>
-              <a:rPr lang="en-US" sz="1700" dirty="0">
+              <a:t>n−1</a:t>
+            </a:r>
+            <a:r>
+              <a:rPr lang="en-US" sz="1400" dirty="0">
                 <a:solidFill>
                   <a:srgbClr val="2B2B2B"/>
                 </a:solidFill>
@@ -18531,9 +18828,75 @@
                 <a:ea typeface="Microsoft YaHei" pitchFamily="34" charset="-122"/>
                 <a:cs typeface="Microsoft YaHei" pitchFamily="34" charset="-120"/>
               </a:rPr>
+              <a:t>；错位相减得 Σ</a:t>
+            </a:r>
+            <a:r>
+              <a:rPr lang="en-US" sz="1400" baseline="-40000" dirty="0">
+                <a:solidFill>
+                  <a:srgbClr val="2B2B2B"/>
+                </a:solidFill>
+                <a:latin typeface="Microsoft YaHei" pitchFamily="34" charset="0"/>
+                <a:ea typeface="Microsoft YaHei" pitchFamily="34" charset="-122"/>
+                <a:cs typeface="Microsoft YaHei" pitchFamily="34" charset="-120"/>
+              </a:rPr>
+              <a:t>i&lt;n</a:t>
+            </a:r>
+            <a:r>
+              <a:rPr lang="en-US" sz="1400" dirty="0">
+                <a:solidFill>
+                  <a:srgbClr val="2B2B2B"/>
+                </a:solidFill>
+                <a:latin typeface="Microsoft YaHei" pitchFamily="34" charset="0"/>
+                <a:ea typeface="Microsoft YaHei" pitchFamily="34" charset="-122"/>
+                <a:cs typeface="Microsoft YaHei" pitchFamily="34" charset="-120"/>
+              </a:rPr>
+              <a:t> i/2</a:t>
+            </a:r>
+            <a:r>
+              <a:rPr lang="en-US" sz="1400" baseline="30000" dirty="0">
+                <a:solidFill>
+                  <a:srgbClr val="2B2B2B"/>
+                </a:solidFill>
+                <a:latin typeface="Microsoft YaHei" pitchFamily="34" charset="0"/>
+                <a:ea typeface="Microsoft YaHei" pitchFamily="34" charset="-122"/>
+                <a:cs typeface="Microsoft YaHei" pitchFamily="34" charset="-120"/>
+              </a:rPr>
+              <a:t>i</a:t>
+            </a:r>
+            <a:r>
+              <a:rPr lang="en-US" sz="1400" dirty="0">
+                <a:solidFill>
+                  <a:srgbClr val="2B2B2B"/>
+                </a:solidFill>
+                <a:latin typeface="Microsoft YaHei" pitchFamily="34" charset="0"/>
+                <a:ea typeface="Microsoft YaHei" pitchFamily="34" charset="-122"/>
+                <a:cs typeface="Microsoft YaHei" pitchFamily="34" charset="-120"/>
+              </a:rPr>
+              <a:t> = 2 − (n+1)/2</a:t>
+            </a:r>
+            <a:r>
+              <a:rPr lang="en-US" sz="1400" baseline="30000" dirty="0">
+                <a:solidFill>
+                  <a:srgbClr val="2B2B2B"/>
+                </a:solidFill>
+                <a:latin typeface="Microsoft YaHei" pitchFamily="34" charset="0"/>
+                <a:ea typeface="Microsoft YaHei" pitchFamily="34" charset="-122"/>
+                <a:cs typeface="Microsoft YaHei" pitchFamily="34" charset="-120"/>
+              </a:rPr>
+              <a:t>n−1</a:t>
+            </a:r>
+            <a:r>
+              <a:rPr lang="en-US" sz="1400" dirty="0">
+                <a:solidFill>
+                  <a:srgbClr val="2B2B2B"/>
+                </a:solidFill>
+                <a:latin typeface="Microsoft YaHei" pitchFamily="34" charset="0"/>
+                <a:ea typeface="Microsoft YaHei" pitchFamily="34" charset="-122"/>
+                <a:cs typeface="Microsoft YaHei" pitchFamily="34" charset="-120"/>
+              </a:rPr>
               <a:t>。</a:t>
             </a:r>
-            <a:endParaRPr lang="en-US" sz="1700" dirty="0"/>
+            <a:endParaRPr lang="en-US" sz="1400" dirty="0"/>
           </a:p>
         </p:txBody>
       </p:sp>
@@ -18545,7 +18908,7 @@
         </p:nvSpPr>
         <p:spPr>
           <a:xfrm>
-            <a:off x="7616952" y="3513277"/>
+            <a:off x="7616952" y="3362858"/>
             <a:ext cx="91440" cy="91440"/>
           </a:xfrm>
           <a:prstGeom prst="ellipse">
@@ -18565,8 +18928,8 @@
         </p:nvSpPr>
         <p:spPr>
           <a:xfrm>
-            <a:off x="7818120" y="3416503"/>
-            <a:ext cx="3520440" cy="624840"/>
+            <a:off x="7818120" y="3291230"/>
+            <a:ext cx="3520440" cy="524256"/>
           </a:xfrm>
           <a:prstGeom prst="rect">
             <a:avLst/>
@@ -18582,7 +18945,7 @@
               <a:buNone/>
             </a:pPr>
             <a:r>
-              <a:rPr lang="en-US" sz="1700" dirty="0">
+              <a:rPr lang="en-US" sz="1400" dirty="0">
                 <a:solidFill>
                   <a:srgbClr val="2B2B2B"/>
                 </a:solidFill>
@@ -18590,9 +18953,53 @@
                 <a:ea typeface="Microsoft YaHei" pitchFamily="34" charset="-122"/>
                 <a:cs typeface="Microsoft YaHei" pitchFamily="34" charset="-120"/>
               </a:rPr>
-              <a:t>验算：n = 1 时 1/2，n = 2 时 1/2 + 2/4 = 1，都与 B 吻合。</a:t>
-            </a:r>
-            <a:endParaRPr lang="en-US" sz="1700" dirty="0"/>
+              <a:t>加上最后一项 n/2</a:t>
+            </a:r>
+            <a:r>
+              <a:rPr lang="en-US" sz="1400" baseline="30000" dirty="0">
+                <a:solidFill>
+                  <a:srgbClr val="2B2B2B"/>
+                </a:solidFill>
+                <a:latin typeface="Microsoft YaHei" pitchFamily="34" charset="0"/>
+                <a:ea typeface="Microsoft YaHei" pitchFamily="34" charset="-122"/>
+                <a:cs typeface="Microsoft YaHei" pitchFamily="34" charset="-120"/>
+              </a:rPr>
+              <a:t>n−1</a:t>
+            </a:r>
+            <a:r>
+              <a:rPr lang="en-US" sz="1400" dirty="0">
+                <a:solidFill>
+                  <a:srgbClr val="2B2B2B"/>
+                </a:solidFill>
+                <a:latin typeface="Microsoft YaHei" pitchFamily="34" charset="0"/>
+                <a:ea typeface="Microsoft YaHei" pitchFamily="34" charset="-122"/>
+                <a:cs typeface="Microsoft YaHei" pitchFamily="34" charset="-120"/>
+              </a:rPr>
+              <a:t>：ASL = 2 − 1/2</a:t>
+            </a:r>
+            <a:r>
+              <a:rPr lang="en-US" sz="1400" baseline="30000" dirty="0">
+                <a:solidFill>
+                  <a:srgbClr val="2B2B2B"/>
+                </a:solidFill>
+                <a:latin typeface="Microsoft YaHei" pitchFamily="34" charset="0"/>
+                <a:ea typeface="Microsoft YaHei" pitchFamily="34" charset="-122"/>
+                <a:cs typeface="Microsoft YaHei" pitchFamily="34" charset="-120"/>
+              </a:rPr>
+              <a:t>n−1</a:t>
+            </a:r>
+            <a:r>
+              <a:rPr lang="en-US" sz="1400" dirty="0">
+                <a:solidFill>
+                  <a:srgbClr val="2B2B2B"/>
+                </a:solidFill>
+                <a:latin typeface="Microsoft YaHei" pitchFamily="34" charset="0"/>
+                <a:ea typeface="Microsoft YaHei" pitchFamily="34" charset="-122"/>
+                <a:cs typeface="Microsoft YaHei" pitchFamily="34" charset="-120"/>
+              </a:rPr>
+              <a:t>，即 D。</a:t>
+            </a:r>
+            <a:endParaRPr lang="en-US" sz="1400" dirty="0"/>
           </a:p>
         </p:txBody>
       </p:sp>
@@ -18604,7 +19011,7 @@
         </p:nvSpPr>
         <p:spPr>
           <a:xfrm>
-            <a:off x="7616952" y="4278020"/>
+            <a:off x="7616952" y="4002329"/>
             <a:ext cx="91440" cy="91440"/>
           </a:xfrm>
           <a:prstGeom prst="ellipse">
@@ -18624,8 +19031,8 @@
         </p:nvSpPr>
         <p:spPr>
           <a:xfrm>
-            <a:off x="7818120" y="4181246"/>
-            <a:ext cx="3520440" cy="1194816"/>
+            <a:off x="7818120" y="3930701"/>
+            <a:ext cx="3520440" cy="758952"/>
           </a:xfrm>
           <a:prstGeom prst="rect">
             <a:avLst/>
@@ -18641,7 +19048,7 @@
               <a:buNone/>
             </a:pPr>
             <a:r>
-              <a:rPr lang="en-US" sz="1700" dirty="0">
+              <a:rPr lang="en-US" sz="1400" dirty="0">
                 <a:solidFill>
                   <a:srgbClr val="2B2B2B"/>
                 </a:solidFill>
@@ -18649,10 +19056,10 @@
                 <a:ea typeface="Microsoft YaHei" pitchFamily="34" charset="-122"/>
                 <a:cs typeface="Microsoft YaHei" pitchFamily="34" charset="-120"/>
               </a:rPr>
-              <a:t>注：题库原答案为 D。D 对应 p</a:t>
-            </a:r>
-            <a:r>
-              <a:rPr lang="en-US" sz="1700" baseline="-40000" dirty="0">
+              <a:t>验算：n = 1 时 p</a:t>
+            </a:r>
+            <a:r>
+              <a:rPr lang="en-US" sz="1400" baseline="-40000" dirty="0">
                 <a:solidFill>
                   <a:srgbClr val="2B2B2B"/>
                 </a:solidFill>
@@ -18660,10 +19067,135 @@
                 <a:ea typeface="Microsoft YaHei" pitchFamily="34" charset="-122"/>
                 <a:cs typeface="Microsoft YaHei" pitchFamily="34" charset="-120"/>
               </a:rPr>
+              <a:t>1</a:t>
+            </a:r>
+            <a:r>
+              <a:rPr lang="en-US" sz="1400" dirty="0">
+                <a:solidFill>
+                  <a:srgbClr val="2B2B2B"/>
+                </a:solidFill>
+                <a:latin typeface="Microsoft YaHei" pitchFamily="34" charset="0"/>
+                <a:ea typeface="Microsoft YaHei" pitchFamily="34" charset="-122"/>
+                <a:cs typeface="Microsoft YaHei" pitchFamily="34" charset="-120"/>
+              </a:rPr>
+              <a:t> = 1，ASL = 1；n = 2 时 1/2 + 2·1/2 = 1.5，都与 D 吻合，其余三项都不符。</a:t>
+            </a:r>
+            <a:endParaRPr lang="en-US" sz="1400" dirty="0"/>
+          </a:p>
+        </p:txBody>
+      </p:sp>
+      <p:sp>
+        <p:nvSpPr>
+          <p:cNvPr id="30" name="ANS_198"/>
+          <p:cNvSpPr/>
+          <p:nvPr/>
+        </p:nvSpPr>
+        <p:spPr>
+          <a:xfrm>
+            <a:off x="7616952" y="4876495"/>
+            <a:ext cx="91440" cy="91440"/>
+          </a:xfrm>
+          <a:prstGeom prst="ellipse">
+            <a:avLst/>
+          </a:prstGeom>
+          <a:solidFill>
+            <a:srgbClr val="F2B134"/>
+          </a:solidFill>
+          <a:ln/>
+        </p:spPr>
+      </p:sp>
+      <p:sp>
+        <p:nvSpPr>
+          <p:cNvPr id="31" name="ANS_199"/>
+          <p:cNvSpPr txBox="1"/>
+          <p:nvPr/>
+        </p:nvSpPr>
+        <p:spPr>
+          <a:xfrm>
+            <a:off x="7818120" y="4804867"/>
+            <a:ext cx="3520440" cy="1228344"/>
+          </a:xfrm>
+          <a:prstGeom prst="rect">
+            <a:avLst/>
+          </a:prstGeom>
+          <a:noFill/>
+          <a:ln/>
+        </p:spPr>
+        <p:txBody>
+          <a:bodyPr wrap="square" lIns="0" tIns="0" rIns="0" bIns="0" rtlCol="0" anchor="t"/>
+          <a:lstStyle/>
+          <a:p>
+            <a:pPr algn="l" indent="0" marL="0">
+              <a:buNone/>
+            </a:pPr>
+            <a:r>
+              <a:rPr lang="en-US" sz="1400" dirty="0">
+                <a:solidFill>
+                  <a:srgbClr val="2B2B2B"/>
+                </a:solidFill>
+                <a:latin typeface="Microsoft YaHei" pitchFamily="34" charset="0"/>
+                <a:ea typeface="Microsoft YaHei" pitchFamily="34" charset="-122"/>
+                <a:cs typeface="Microsoft YaHei" pitchFamily="34" charset="-120"/>
+              </a:rPr>
+              <a:t>注：原题写作 p</a:t>
+            </a:r>
+            <a:r>
+              <a:rPr lang="en-US" sz="1400" baseline="-40000" dirty="0">
+                <a:solidFill>
+                  <a:srgbClr val="2B2B2B"/>
+                </a:solidFill>
+                <a:latin typeface="Microsoft YaHei" pitchFamily="34" charset="0"/>
+                <a:ea typeface="Microsoft YaHei" pitchFamily="34" charset="-122"/>
+                <a:cs typeface="Microsoft YaHei" pitchFamily="34" charset="-120"/>
+              </a:rPr>
+              <a:t>i</a:t>
+            </a:r>
+            <a:r>
+              <a:rPr lang="en-US" sz="1400" dirty="0">
+                <a:solidFill>
+                  <a:srgbClr val="2B2B2B"/>
+                </a:solidFill>
+                <a:latin typeface="Microsoft YaHei" pitchFamily="34" charset="0"/>
+                <a:ea typeface="Microsoft YaHei" pitchFamily="34" charset="-122"/>
+                <a:cs typeface="Microsoft YaHei" pitchFamily="34" charset="-120"/>
+              </a:rPr>
+              <a:t> = 2</a:t>
+            </a:r>
+            <a:r>
+              <a:rPr lang="en-US" sz="1400" baseline="30000" dirty="0">
+                <a:solidFill>
+                  <a:srgbClr val="2B2B2B"/>
+                </a:solidFill>
+                <a:latin typeface="Microsoft YaHei" pitchFamily="34" charset="0"/>
+                <a:ea typeface="Microsoft YaHei" pitchFamily="34" charset="-122"/>
+                <a:cs typeface="Microsoft YaHei" pitchFamily="34" charset="-120"/>
+              </a:rPr>
+              <a:t>−i</a:t>
+            </a:r>
+            <a:r>
+              <a:rPr lang="en-US" sz="1400" dirty="0">
+                <a:solidFill>
+                  <a:srgbClr val="2B2B2B"/>
+                </a:solidFill>
+                <a:latin typeface="Microsoft YaHei" pitchFamily="34" charset="0"/>
+                <a:ea typeface="Microsoft YaHei" pitchFamily="34" charset="-122"/>
+                <a:cs typeface="Microsoft YaHei" pitchFamily="34" charset="-120"/>
+              </a:rPr>
+              <a:t>（1 ≤ i ≤ n），概率之和只有 1 − 1/2</a:t>
+            </a:r>
+            <a:r>
+              <a:rPr lang="en-US" sz="1400" baseline="30000" dirty="0">
+                <a:solidFill>
+                  <a:srgbClr val="2B2B2B"/>
+                </a:solidFill>
+                <a:latin typeface="Microsoft YaHei" pitchFamily="34" charset="0"/>
+                <a:ea typeface="Microsoft YaHei" pitchFamily="34" charset="-122"/>
+                <a:cs typeface="Microsoft YaHei" pitchFamily="34" charset="-120"/>
+              </a:rPr>
               <a:t>n</a:t>
             </a:r>
             <a:r>
-              <a:rPr lang="en-US" sz="1700" dirty="0">
+              <a:rPr lang="en-US" sz="1400" dirty="0">
                 <a:solidFill>
                   <a:srgbClr val="2B2B2B"/>
                 </a:solidFill>
@@ -18671,10 +19203,10 @@
                 <a:ea typeface="Microsoft YaHei" pitchFamily="34" charset="-122"/>
                 <a:cs typeface="Microsoft YaHei" pitchFamily="34" charset="-120"/>
               </a:rPr>
-              <a:t> = 1/2</a:t>
-            </a:r>
-            <a:r>
-              <a:rPr lang="en-US" sz="1700" baseline="30000" dirty="0">
+              <a:t>；按那个题面算得 2 − (n+2)/2</a:t>
+            </a:r>
+            <a:r>
+              <a:rPr lang="en-US" sz="1400" baseline="30000" dirty="0">
                 <a:solidFill>
                   <a:srgbClr val="2B2B2B"/>
                 </a:solidFill>
@@ -18682,10 +19214,10 @@
                 <a:ea typeface="Microsoft YaHei" pitchFamily="34" charset="-122"/>
                 <a:cs typeface="Microsoft YaHei" pitchFamily="34" charset="-120"/>
               </a:rPr>
-              <a:t>n−1</a:t>
-            </a:r>
-            <a:r>
-              <a:rPr lang="en-US" sz="1700" dirty="0">
+              <a:t>n</a:t>
+            </a:r>
+            <a:r>
+              <a:rPr lang="en-US" sz="1400" dirty="0">
                 <a:solidFill>
                   <a:srgbClr val="2B2B2B"/>
                 </a:solidFill>
@@ -18693,10 +19225,10 @@
                 <a:ea typeface="Microsoft YaHei" pitchFamily="34" charset="-122"/>
                 <a:cs typeface="Microsoft YaHei" pitchFamily="34" charset="-120"/>
               </a:rPr>
-              <a:t>（让概率之和为 1）的题设：Σ</a:t>
-            </a:r>
-            <a:r>
-              <a:rPr lang="en-US" sz="1700" baseline="-40000" dirty="0">
+              <a:t>（B），与题库答案 D 不一致。已把 p</a:t>
+            </a:r>
+            <a:r>
+              <a:rPr lang="en-US" sz="1400" baseline="-40000" dirty="0">
                 <a:solidFill>
                   <a:srgbClr val="2B2B2B"/>
                 </a:solidFill>
@@ -18704,10 +19236,10 @@
                 <a:ea typeface="Microsoft YaHei" pitchFamily="34" charset="-122"/>
                 <a:cs typeface="Microsoft YaHei" pitchFamily="34" charset="-120"/>
               </a:rPr>
-              <a:t>i&lt;n</a:t>
-            </a:r>
-            <a:r>
-              <a:rPr lang="en-US" sz="1700" dirty="0">
+              <a:t>n</a:t>
+            </a:r>
+            <a:r>
+              <a:rPr lang="en-US" sz="1400" dirty="0">
                 <a:solidFill>
                   <a:srgbClr val="2B2B2B"/>
                 </a:solidFill>
@@ -18715,10 +19247,10 @@
                 <a:ea typeface="Microsoft YaHei" pitchFamily="34" charset="-122"/>
                 <a:cs typeface="Microsoft YaHei" pitchFamily="34" charset="-120"/>
               </a:rPr>
-              <a:t> i/2</a:t>
-            </a:r>
-            <a:r>
-              <a:rPr lang="en-US" sz="1700" baseline="30000" dirty="0">
+              <a:t> 改为 2</a:t>
+            </a:r>
+            <a:r>
+              <a:rPr lang="en-US" sz="1400" baseline="30000" dirty="0">
                 <a:solidFill>
                   <a:srgbClr val="2B2B2B"/>
                 </a:solidFill>
@@ -18726,10 +19258,10 @@
                 <a:ea typeface="Microsoft YaHei" pitchFamily="34" charset="-122"/>
                 <a:cs typeface="Microsoft YaHei" pitchFamily="34" charset="-120"/>
               </a:rPr>
-              <a:t>i</a:t>
-            </a:r>
-            <a:r>
-              <a:rPr lang="en-US" sz="1700" dirty="0">
+              <a:t>−(n−1)</a:t>
+            </a:r>
+            <a:r>
+              <a:rPr lang="en-US" sz="1400" dirty="0">
                 <a:solidFill>
                   <a:srgbClr val="2B2B2B"/>
                 </a:solidFill>
@@ -18737,53 +19269,9 @@
                 <a:ea typeface="Microsoft YaHei" pitchFamily="34" charset="-122"/>
                 <a:cs typeface="Microsoft YaHei" pitchFamily="34" charset="-120"/>
               </a:rPr>
-              <a:t> + n/2</a:t>
-            </a:r>
-            <a:r>
-              <a:rPr lang="en-US" sz="1700" baseline="30000" dirty="0">
-                <a:solidFill>
-                  <a:srgbClr val="2B2B2B"/>
-                </a:solidFill>
-                <a:latin typeface="Microsoft YaHei" pitchFamily="34" charset="0"/>
-                <a:ea typeface="Microsoft YaHei" pitchFamily="34" charset="-122"/>
-                <a:cs typeface="Microsoft YaHei" pitchFamily="34" charset="-120"/>
-              </a:rPr>
-              <a:t>n−1</a:t>
-            </a:r>
-            <a:r>
-              <a:rPr lang="en-US" sz="1700" dirty="0">
-                <a:solidFill>
-                  <a:srgbClr val="2B2B2B"/>
-                </a:solidFill>
-                <a:latin typeface="Microsoft YaHei" pitchFamily="34" charset="0"/>
-                <a:ea typeface="Microsoft YaHei" pitchFamily="34" charset="-122"/>
-                <a:cs typeface="Microsoft YaHei" pitchFamily="34" charset="-120"/>
-              </a:rPr>
-              <a:t> = 2 − 1/2</a:t>
-            </a:r>
-            <a:r>
-              <a:rPr lang="en-US" sz="1700" baseline="30000" dirty="0">
-                <a:solidFill>
-                  <a:srgbClr val="2B2B2B"/>
-                </a:solidFill>
-                <a:latin typeface="Microsoft YaHei" pitchFamily="34" charset="0"/>
-                <a:ea typeface="Microsoft YaHei" pitchFamily="34" charset="-122"/>
-                <a:cs typeface="Microsoft YaHei" pitchFamily="34" charset="-120"/>
-              </a:rPr>
-              <a:t>n−1</a:t>
-            </a:r>
-            <a:r>
-              <a:rPr lang="en-US" sz="1700" dirty="0">
-                <a:solidFill>
-                  <a:srgbClr val="2B2B2B"/>
-                </a:solidFill>
-                <a:latin typeface="Microsoft YaHei" pitchFamily="34" charset="0"/>
-                <a:ea typeface="Microsoft YaHei" pitchFamily="34" charset="-122"/>
-                <a:cs typeface="Microsoft YaHei" pitchFamily="34" charset="-120"/>
-              </a:rPr>
-              <a:t>。</a:t>
-            </a:r>
-            <a:endParaRPr lang="en-US" sz="1700" dirty="0"/>
+              <a:t>，与题库答案 D 统一。</a:t>
+            </a:r>
+            <a:endParaRPr lang="en-US" sz="1400" dirty="0"/>
           </a:p>
         </p:txBody>
       </p:sp>
@@ -19191,6 +19679,76 @@
                                         <p:cTn id="37" dur="400"/>
                                         <p:tgtEl>
                                           <p:spTgt spid="29"/>
+                                        </p:tgtEl>
+                                      </p:cBhvr>
+                                    </p:animEffect>
+                                  </p:childTnLst>
+                                </p:cTn>
+                              </p:par>
+                              <p:par>
+                                <p:cTn id="38" presetID="10" presetClass="entr" presetSubtype="0" fill="hold" grpId="0" nodeType="withEffect">
+                                  <p:stCondLst>
+                                    <p:cond delay="0"/>
+                                  </p:stCondLst>
+                                  <p:childTnLst>
+                                    <p:set>
+                                      <p:cBhvr>
+                                        <p:cTn id="39" dur="1" fill="hold">
+                                          <p:stCondLst>
+                                            <p:cond delay="0"/>
+                                          </p:stCondLst>
+                                        </p:cTn>
+                                        <p:tgtEl>
+                                          <p:spTgt spid="30"/>
+                                        </p:tgtEl>
+                                        <p:attrNameLst>
+                                          <p:attrName>style.visibility</p:attrName>
+                                        </p:attrNameLst>
+                                      </p:cBhvr>
+                                      <p:to>
+                                        <p:strVal val="visible"/>
+                                      </p:to>
+                                    </p:set>
+                                    <p:animEffect transition="in" filter="fade">
+                                      <p:cBhvr>
+                                        <p:cTn id="40" dur="400"/>
+                                        <p:tgtEl>
+                                          <p:spTgt spid="30"/>
+                                        </p:tgtEl>
+                                      </p:cBhvr>
+                                    </p:animEffect>
+                                  </p:childTnLst>
+                                </p:cTn>
+                              </p:par>
+                              <p:par>
+                                <p:cTn id="41" presetID="10" presetClass="entr" presetSubtype="0" fill="hold" grpId="0" nodeType="withEffect">
+                                  <p:stCondLst>
+                                    <p:cond delay="0"/>
+                                  </p:stCondLst>
+                                  <p:childTnLst>
+                                    <p:set>
+                                      <p:cBhvr>
+                                        <p:cTn id="42" dur="1" fill="hold">
+                                          <p:stCondLst>
+                                            <p:cond delay="0"/>
+                                          </p:stCondLst>
+                                        </p:cTn>
+                                        <p:tgtEl>
+                                          <p:spTgt spid="31"/>
+                                        </p:tgtEl>
+                                        <p:attrNameLst>
+                                          <p:attrName>style.visibility</p:attrName>
+                                        </p:attrNameLst>
+                                      </p:cBhvr>
+                                      <p:to>
+                                        <p:strVal val="visible"/>
+                                      </p:to>
+                                    </p:set>
+                                    <p:animEffect transition="in" filter="fade">
+                                      <p:cBhvr>
+                                        <p:cTn id="43" dur="400"/>
+                                        <p:tgtEl>
+                                          <p:spTgt spid="31"/>
                                         </p:tgtEl>
                                       </p:cBhvr>
                                     </p:animEffect>
@@ -19236,6 +19794,8 @@
       <p:bldP spid="27" grpId="0" animBg="1"/>
       <p:bldP spid="28" grpId="0" animBg="1"/>
       <p:bldP spid="29" grpId="0" animBg="1"/>
+      <p:bldP spid="30" grpId="0" animBg="1"/>
+      <p:bldP spid="31" grpId="0" animBg="1"/>
     </p:bldLst>
   </p:timing>
 </p:sld>
@@ -19835,7 +20395,7 @@
       </p:sp>
       <p:sp>
         <p:nvSpPr>
-          <p:cNvPr id="19" name="ANS_198"/>
+          <p:cNvPr id="19" name="ANS_200"/>
           <p:cNvSpPr/>
           <p:nvPr/>
         </p:nvSpPr>
@@ -19860,7 +20420,7 @@
       </p:sp>
       <p:sp>
         <p:nvSpPr>
-          <p:cNvPr id="20" name="ANS_199"/>
+          <p:cNvPr id="20" name="ANS_201"/>
           <p:cNvSpPr/>
           <p:nvPr/>
         </p:nvSpPr>
@@ -19887,7 +20447,7 @@
       </p:sp>
       <p:sp>
         <p:nvSpPr>
-          <p:cNvPr id="21" name="ANS_200"/>
+          <p:cNvPr id="21" name="ANS_202"/>
           <p:cNvSpPr txBox="1"/>
           <p:nvPr/>
         </p:nvSpPr>
@@ -19926,7 +20486,7 @@
       </p:sp>
       <p:sp>
         <p:nvSpPr>
-          <p:cNvPr id="22" name="ANS_201"/>
+          <p:cNvPr id="22" name="ANS_203"/>
           <p:cNvSpPr txBox="1"/>
           <p:nvPr/>
         </p:nvSpPr>
@@ -19965,7 +20525,7 @@
       </p:sp>
       <p:sp>
         <p:nvSpPr>
-          <p:cNvPr id="23" name="ANS_202"/>
+          <p:cNvPr id="23" name="ANS_204"/>
           <p:cNvSpPr txBox="1"/>
           <p:nvPr/>
         </p:nvSpPr>
@@ -20004,7 +20564,7 @@
       </p:sp>
       <p:sp>
         <p:nvSpPr>
-          <p:cNvPr id="24" name="ANS_203"/>
+          <p:cNvPr id="24" name="ANS_205"/>
           <p:cNvSpPr/>
           <p:nvPr/>
         </p:nvSpPr>
@@ -20024,7 +20584,7 @@
       </p:sp>
       <p:sp>
         <p:nvSpPr>
-          <p:cNvPr id="25" name="ANS_204"/>
+          <p:cNvPr id="25" name="ANS_206"/>
           <p:cNvSpPr txBox="1"/>
           <p:nvPr/>
         </p:nvSpPr>
@@ -20965,7 +21525,7 @@
       </p:sp>
       <p:sp>
         <p:nvSpPr>
-          <p:cNvPr id="19" name="ANS_205"/>
+          <p:cNvPr id="19" name="ANS_207"/>
           <p:cNvSpPr/>
           <p:nvPr/>
         </p:nvSpPr>
@@ -20990,7 +21550,7 @@
       </p:sp>
       <p:sp>
         <p:nvSpPr>
-          <p:cNvPr id="20" name="ANS_206"/>
+          <p:cNvPr id="20" name="ANS_208"/>
           <p:cNvSpPr/>
           <p:nvPr/>
         </p:nvSpPr>
@@ -21015,7 +21575,7 @@
       </p:sp>
       <p:sp>
         <p:nvSpPr>
-          <p:cNvPr id="21" name="ANS_207"/>
+          <p:cNvPr id="21" name="ANS_209"/>
           <p:cNvSpPr/>
           <p:nvPr/>
         </p:nvSpPr>
@@ -21042,7 +21602,7 @@
       </p:sp>
       <p:sp>
         <p:nvSpPr>
-          <p:cNvPr id="22" name="ANS_208"/>
+          <p:cNvPr id="22" name="ANS_210"/>
           <p:cNvSpPr txBox="1"/>
           <p:nvPr/>
         </p:nvSpPr>
@@ -21081,7 +21641,7 @@
       </p:sp>
       <p:sp>
         <p:nvSpPr>
-          <p:cNvPr id="23" name="ANS_209"/>
+          <p:cNvPr id="23" name="ANS_211"/>
           <p:cNvSpPr txBox="1"/>
           <p:nvPr/>
         </p:nvSpPr>
@@ -21120,7 +21680,7 @@
       </p:sp>
       <p:sp>
         <p:nvSpPr>
-          <p:cNvPr id="24" name="ANS_210"/>
+          <p:cNvPr id="24" name="ANS_212"/>
           <p:cNvSpPr txBox="1"/>
           <p:nvPr/>
         </p:nvSpPr>
@@ -21159,7 +21719,7 @@
       </p:sp>
       <p:sp>
         <p:nvSpPr>
-          <p:cNvPr id="25" name="ANS_211"/>
+          <p:cNvPr id="25" name="ANS_213"/>
           <p:cNvSpPr/>
           <p:nvPr/>
         </p:nvSpPr>
@@ -21179,7 +21739,7 @@
       </p:sp>
       <p:sp>
         <p:nvSpPr>
-          <p:cNvPr id="26" name="ANS_212"/>
+          <p:cNvPr id="26" name="ANS_214"/>
           <p:cNvSpPr txBox="1"/>
           <p:nvPr/>
         </p:nvSpPr>
@@ -21218,7 +21778,7 @@
       </p:sp>
       <p:sp>
         <p:nvSpPr>
-          <p:cNvPr id="27" name="ANS_213"/>
+          <p:cNvPr id="27" name="ANS_215"/>
           <p:cNvSpPr/>
           <p:nvPr/>
         </p:nvSpPr>
@@ -21238,7 +21798,7 @@
       </p:sp>
       <p:sp>
         <p:nvSpPr>
-          <p:cNvPr id="28" name="ANS_214"/>
+          <p:cNvPr id="28" name="ANS_216"/>
           <p:cNvSpPr txBox="1"/>
           <p:nvPr/>
         </p:nvSpPr>
@@ -21277,7 +21837,7 @@
       </p:sp>
       <p:sp>
         <p:nvSpPr>
-          <p:cNvPr id="29" name="ANS_215"/>
+          <p:cNvPr id="29" name="ANS_217"/>
           <p:cNvSpPr/>
           <p:nvPr/>
         </p:nvSpPr>
@@ -21297,7 +21857,7 @@
       </p:sp>
       <p:sp>
         <p:nvSpPr>
-          <p:cNvPr id="30" name="ANS_216"/>
+          <p:cNvPr id="30" name="ANS_218"/>
           <p:cNvSpPr txBox="1"/>
           <p:nvPr/>
         </p:nvSpPr>
@@ -21336,7 +21896,7 @@
       </p:sp>
       <p:sp>
         <p:nvSpPr>
-          <p:cNvPr id="31" name="ANS_217"/>
+          <p:cNvPr id="31" name="ANS_219"/>
           <p:cNvSpPr/>
           <p:nvPr/>
         </p:nvSpPr>
@@ -21356,7 +21916,7 @@
       </p:sp>
       <p:sp>
         <p:nvSpPr>
-          <p:cNvPr id="32" name="ANS_218"/>
+          <p:cNvPr id="32" name="ANS_220"/>
           <p:cNvSpPr txBox="1"/>
           <p:nvPr/>
         </p:nvSpPr>
@@ -22157,7 +22717,7 @@
       </p:sp>
       <p:sp>
         <p:nvSpPr>
-          <p:cNvPr id="7" name="ANS_219"/>
+          <p:cNvPr id="7" name="ANS_221"/>
           <p:cNvSpPr/>
           <p:nvPr/>
         </p:nvSpPr>
@@ -22184,7 +22744,7 @@
       </p:sp>
       <p:sp>
         <p:nvSpPr>
-          <p:cNvPr id="8" name="ANS_220"/>
+          <p:cNvPr id="8" name="ANS_222"/>
           <p:cNvSpPr txBox="1"/>
           <p:nvPr/>
         </p:nvSpPr>
@@ -22223,7 +22783,7 @@
       </p:sp>
       <p:sp>
         <p:nvSpPr>
-          <p:cNvPr id="9" name="ANS_221"/>
+          <p:cNvPr id="9" name="ANS_223"/>
           <p:cNvSpPr txBox="1"/>
           <p:nvPr/>
         </p:nvSpPr>
@@ -22262,7 +22822,7 @@
       </p:sp>
       <p:sp>
         <p:nvSpPr>
-          <p:cNvPr id="10" name="ANS_222"/>
+          <p:cNvPr id="10" name="ANS_224"/>
           <p:cNvSpPr txBox="1"/>
           <p:nvPr/>
         </p:nvSpPr>
@@ -22301,7 +22861,7 @@
       </p:sp>
       <p:sp>
         <p:nvSpPr>
-          <p:cNvPr id="11" name="ANS_223"/>
+          <p:cNvPr id="11" name="ANS_225"/>
           <p:cNvSpPr/>
           <p:nvPr/>
         </p:nvSpPr>
@@ -22321,7 +22881,7 @@
       </p:sp>
       <p:sp>
         <p:nvSpPr>
-          <p:cNvPr id="12" name="ANS_224"/>
+          <p:cNvPr id="12" name="ANS_226"/>
           <p:cNvSpPr txBox="1"/>
           <p:nvPr/>
         </p:nvSpPr>
@@ -22360,7 +22920,7 @@
       </p:sp>
       <p:sp>
         <p:nvSpPr>
-          <p:cNvPr id="13" name="ANS_225"/>
+          <p:cNvPr id="13" name="ANS_227"/>
           <p:cNvSpPr/>
           <p:nvPr/>
         </p:nvSpPr>
@@ -22380,7 +22940,7 @@
       </p:sp>
       <p:sp>
         <p:nvSpPr>
-          <p:cNvPr id="14" name="ANS_226"/>
+          <p:cNvPr id="14" name="ANS_228"/>
           <p:cNvSpPr txBox="1"/>
           <p:nvPr/>
         </p:nvSpPr>
@@ -22419,7 +22979,7 @@
       </p:sp>
       <p:sp>
         <p:nvSpPr>
-          <p:cNvPr id="15" name="ANS_227"/>
+          <p:cNvPr id="15" name="ANS_229"/>
           <p:cNvSpPr/>
           <p:nvPr/>
         </p:nvSpPr>
@@ -22439,7 +22999,7 @@
       </p:sp>
       <p:sp>
         <p:nvSpPr>
-          <p:cNvPr id="16" name="ANS_228"/>
+          <p:cNvPr id="16" name="ANS_230"/>
           <p:cNvSpPr txBox="1"/>
           <p:nvPr/>
         </p:nvSpPr>
@@ -22478,7 +23038,7 @@
       </p:sp>
       <p:sp>
         <p:nvSpPr>
-          <p:cNvPr id="17" name="ANS_229"/>
+          <p:cNvPr id="17" name="ANS_231"/>
           <p:cNvSpPr/>
           <p:nvPr/>
         </p:nvSpPr>
@@ -22498,7 +23058,7 @@
       </p:sp>
       <p:sp>
         <p:nvSpPr>
-          <p:cNvPr id="18" name="ANS_230"/>
+          <p:cNvPr id="18" name="ANS_232"/>
           <p:cNvSpPr txBox="1"/>
           <p:nvPr/>
         </p:nvSpPr>
@@ -23227,7 +23787,7 @@
       </p:sp>
       <p:sp>
         <p:nvSpPr>
-          <p:cNvPr id="7" name="ANS_231"/>
+          <p:cNvPr id="7" name="ANS_233"/>
           <p:cNvSpPr/>
           <p:nvPr/>
         </p:nvSpPr>
@@ -23254,7 +23814,7 @@
       </p:sp>
       <p:sp>
         <p:nvSpPr>
-          <p:cNvPr id="8" name="ANS_232"/>
+          <p:cNvPr id="8" name="ANS_234"/>
           <p:cNvSpPr txBox="1"/>
           <p:nvPr/>
         </p:nvSpPr>
@@ -23293,7 +23853,7 @@
       </p:sp>
       <p:sp>
         <p:nvSpPr>
-          <p:cNvPr id="9" name="ANS_233"/>
+          <p:cNvPr id="9" name="ANS_235"/>
           <p:cNvSpPr txBox="1"/>
           <p:nvPr/>
         </p:nvSpPr>
@@ -23332,7 +23892,7 @@
       </p:sp>
       <p:sp>
         <p:nvSpPr>
-          <p:cNvPr id="10" name="ANS_234"/>
+          <p:cNvPr id="10" name="ANS_236"/>
           <p:cNvSpPr txBox="1"/>
           <p:nvPr/>
         </p:nvSpPr>
@@ -23371,7 +23931,7 @@
       </p:sp>
       <p:sp>
         <p:nvSpPr>
-          <p:cNvPr id="11" name="ANS_235"/>
+          <p:cNvPr id="11" name="ANS_237"/>
           <p:cNvSpPr/>
           <p:nvPr/>
         </p:nvSpPr>
@@ -23391,7 +23951,7 @@
       </p:sp>
       <p:sp>
         <p:nvSpPr>
-          <p:cNvPr id="12" name="ANS_236"/>
+          <p:cNvPr id="12" name="ANS_238"/>
           <p:cNvSpPr txBox="1"/>
           <p:nvPr/>
         </p:nvSpPr>
@@ -23430,7 +23990,7 @@
       </p:sp>
       <p:sp>
         <p:nvSpPr>
-          <p:cNvPr id="13" name="ANS_237"/>
+          <p:cNvPr id="13" name="ANS_239"/>
           <p:cNvSpPr/>
           <p:nvPr/>
         </p:nvSpPr>
@@ -23450,7 +24010,7 @@
       </p:sp>
       <p:sp>
         <p:nvSpPr>
-          <p:cNvPr id="14" name="ANS_238"/>
+          <p:cNvPr id="14" name="ANS_240"/>
           <p:cNvSpPr txBox="1"/>
           <p:nvPr/>
         </p:nvSpPr>
@@ -23489,7 +24049,7 @@
       </p:sp>
       <p:sp>
         <p:nvSpPr>
-          <p:cNvPr id="15" name="ANS_239"/>
+          <p:cNvPr id="15" name="ANS_241"/>
           <p:cNvSpPr/>
           <p:nvPr/>
         </p:nvSpPr>
@@ -23509,7 +24069,7 @@
       </p:sp>
       <p:sp>
         <p:nvSpPr>
-          <p:cNvPr id="16" name="ANS_240"/>
+          <p:cNvPr id="16" name="ANS_242"/>
           <p:cNvSpPr txBox="1"/>
           <p:nvPr/>
         </p:nvSpPr>
@@ -23548,7 +24108,7 @@
       </p:sp>
       <p:sp>
         <p:nvSpPr>
-          <p:cNvPr id="17" name="ANS_241"/>
+          <p:cNvPr id="17" name="ANS_243"/>
           <p:cNvSpPr/>
           <p:nvPr/>
         </p:nvSpPr>
@@ -23568,7 +24128,7 @@
       </p:sp>
       <p:sp>
         <p:nvSpPr>
-          <p:cNvPr id="18" name="ANS_242"/>
+          <p:cNvPr id="18" name="ANS_244"/>
           <p:cNvSpPr txBox="1"/>
           <p:nvPr/>
         </p:nvSpPr>
@@ -23607,7 +24167,7 @@
       </p:sp>
       <p:sp>
         <p:nvSpPr>
-          <p:cNvPr id="19" name="ANS_243"/>
+          <p:cNvPr id="19" name="ANS_245"/>
           <p:cNvSpPr/>
           <p:nvPr/>
         </p:nvSpPr>
@@ -23627,7 +24187,7 @@
       </p:sp>
       <p:sp>
         <p:nvSpPr>
-          <p:cNvPr id="20" name="ANS_244"/>
+          <p:cNvPr id="20" name="ANS_246"/>
           <p:cNvSpPr txBox="1"/>
           <p:nvPr/>
         </p:nvSpPr>
